--- a/lecons/F1/19_F1_M3_L11_The_Internal_Structure_of_the_Earth.pptx
+++ b/lecons/F1/19_F1_M3_L11_The_Internal_Structure_of_the_Earth.pptx
@@ -54,9 +54,11 @@
     <p:sldId id="302" r:id="rId48"/>
     <p:sldId id="303" r:id="rId49"/>
     <p:sldId id="304" r:id="rId50"/>
+    <p:sldId id="305" r:id="rId51"/>
+    <p:sldId id="306" r:id="rId52"/>
   </p:sldIdLst>
   <p:notesMasterIdLst>
-    <p:notesMasterId r:id="rId51"/>
+    <p:notesMasterId r:id="rId53"/>
   </p:notesMasterIdLst>
   <p:sldSz cx="12192000" cy="6858000"/>
   <p:notesSz cx="6858000" cy="12192000"/>
@@ -726,7 +728,7 @@
           <a:p>
             <a:r>
               <a:rPr lang="en-US" dirty="0"/>
-              <a:t>Good. Moussa wants to know the layers inside the Earth.</a:t>
+              <a:t>Good. Moussa does not know the layers inside the Earth.</a:t>
             </a:r>
             <a:endParaRPr lang="en-US" dirty="0"/>
           </a:p>
@@ -1342,7 +1344,7 @@
           <a:p>
             <a:r>
               <a:rPr lang="en-US" dirty="0"/>
-              <a:t>Activity 1. Look carefully at this picture: rocks and soil of the crust. Observe every detail before I ask the question.</a:t>
+              <a:t>Activity 1. Look carefully at this picture: rocks and soil. Observe every detail before I ask the question.</a:t>
             </a:r>
             <a:endParaRPr lang="en-US" dirty="0"/>
           </a:p>
@@ -1430,7 +1432,7 @@
           <a:p>
             <a:r>
               <a:rPr lang="en-US" dirty="0"/>
-              <a:t>Here is the question for Activity 1: What is the crust? Take one minute to think and write your answer in your rough notebook.</a:t>
+              <a:t>Here is the question for Activity 1: On which layer of the Earth do we live? Take one minute to think and write your answer in your rough notebook.</a:t>
             </a:r>
             <a:endParaRPr lang="en-US" dirty="0"/>
           </a:p>
@@ -1606,7 +1608,7 @@
           <a:p>
             <a:r>
               <a:rPr lang="en-US" dirty="0"/>
-              <a:t>Let us check the answer together. It is the thin, solid outer layer of the Earth on which we live.</a:t>
+              <a:t>Let us check the answer together. On the crust, the thin and solid outer layer.</a:t>
             </a:r>
             <a:endParaRPr lang="en-US" dirty="0"/>
           </a:p>
@@ -1694,7 +1696,7 @@
           <a:p>
             <a:r>
               <a:rPr lang="en-US" dirty="0"/>
-              <a:t>Activity 2. Look carefully at this diagram: the layers of the Earth. Observe every detail before I ask the question.</a:t>
+              <a:t>Activity 2. Look carefully at this picture: lava coming out of a volcano. Observe every detail before I ask the question.</a:t>
             </a:r>
             <a:endParaRPr lang="en-US" dirty="0"/>
           </a:p>
@@ -1782,7 +1784,7 @@
           <a:p>
             <a:r>
               <a:rPr lang="en-US" dirty="0"/>
-              <a:t>Here is the question for Activity 2: Name the three main layers of the Earth from the surface to the centre. Take one minute to think and write your answer in your rough notebook.</a:t>
+              <a:t>Here is the question for Activity 2: Where does the hot lava of volcanoes come from? Take one minute to think and write your answer in your rough notebook.</a:t>
             </a:r>
             <a:endParaRPr lang="en-US" dirty="0"/>
           </a:p>
@@ -1870,7 +1872,7 @@
           <a:p>
             <a:r>
               <a:rPr lang="en-US" dirty="0"/>
-              <a:t>Let us check the answer together. The crust, the mantle and the core.</a:t>
+              <a:t>Let us check the answer together. From the very hot mantle under the crust.</a:t>
             </a:r>
             <a:endParaRPr lang="en-US" dirty="0"/>
           </a:p>
@@ -1958,7 +1960,7 @@
           <a:p>
             <a:r>
               <a:rPr lang="en-US" dirty="0"/>
-              <a:t>Activity 3. Look carefully at this picture: lava coming out of a volcano. Observe every detail before I ask the question.</a:t>
+              <a:t>Activity 3. Look carefully at this animation: animation: a journey to the centre of the Earth. Watch the animation to the end; it will play again.</a:t>
             </a:r>
             <a:endParaRPr lang="en-US" dirty="0"/>
           </a:p>
@@ -2046,7 +2048,7 @@
           <a:p>
             <a:r>
               <a:rPr lang="en-US" dirty="0"/>
-              <a:t>Here is the question for Activity 3: Where does the hot lava of volcanoes come from? Take one minute to think and write your answer in your rough notebook.</a:t>
+              <a:t>Here is the question for Activity 3: What do we find at the centre of the Earth? Take one minute to think and write your answer in your rough notebook.</a:t>
             </a:r>
             <a:endParaRPr lang="en-US" dirty="0"/>
           </a:p>
@@ -2134,7 +2136,7 @@
           <a:p>
             <a:r>
               <a:rPr lang="en-US" dirty="0"/>
-              <a:t>Let us check the answer together. From the hot mantle under the crust.</a:t>
+              <a:t>Let us check the answer together. The core, made mainly of very hot iron and nickel.</a:t>
             </a:r>
             <a:endParaRPr lang="en-US" dirty="0"/>
           </a:p>
@@ -2222,7 +2224,7 @@
           <a:p>
             <a:r>
               <a:rPr lang="en-US" dirty="0"/>
-              <a:t>Activity 4. Look carefully at this animation: animation: a journey to the centre of the Earth. Watch the animation to the end; it will play again.</a:t>
+              <a:t>Activity 4. Look carefully at this diagram: a cut through the Earth. Observe every detail before I ask the question.</a:t>
             </a:r>
             <a:endParaRPr lang="en-US" dirty="0"/>
           </a:p>
@@ -2310,7 +2312,7 @@
           <a:p>
             <a:r>
               <a:rPr lang="en-US" dirty="0"/>
-              <a:t>Here is the question for Activity 4: What is the core made of? Take one minute to think and write your answer in your rough notebook.</a:t>
+              <a:t>Here is the question for Activity 4: How many main layers can you see in this cut through the Earth? Take one minute to think and write your answer in your rough notebook.</a:t>
             </a:r>
             <a:endParaRPr lang="en-US" dirty="0"/>
           </a:p>
@@ -2398,7 +2400,7 @@
           <a:p>
             <a:r>
               <a:rPr lang="en-US" dirty="0"/>
-              <a:t>Let us check the answer together. Mainly iron and nickel, very hot; the outer core is liquid and the inner core is solid.</a:t>
+              <a:t>Let us check the answer together. Three: the crust, the mantle and the core.</a:t>
             </a:r>
             <a:endParaRPr lang="en-US" dirty="0"/>
           </a:p>
@@ -2486,7 +2488,7 @@
           <a:p>
             <a:r>
               <a:rPr lang="en-US" dirty="0"/>
-              <a:t>Our topic is Protection against the Wrath of Nature, and the sub-topic is Movements of the Earth's Crust. The key notions we shall use today are: crust, mantle, core, lithosphere. At the end, you should be able to do this: learners are able to identify and draw the layers of the Earth.</a:t>
+              <a:t>Our topic is Protection against the Wrath of Nature, and the sub-topic is Movements of the Earth's Crust. The key notions we shall use today are: lithosphere, plate motion, tectonic movements. At the end, you should be able to do this: learners are able to identify and draw the layers of the Earth.</a:t>
             </a:r>
             <a:endParaRPr lang="en-US" dirty="0"/>
           </a:p>
@@ -2574,7 +2576,7 @@
           <a:p>
             <a:r>
               <a:rPr lang="en-US" dirty="0"/>
-              <a:t>Activity 5. Look carefully at this diagram: boundaries between the layers. Observe every detail before I ask the question.</a:t>
+              <a:t>Activity 5. Look carefully at this diagram: the thickness of the layers. Observe every detail before I ask the question.</a:t>
             </a:r>
             <a:endParaRPr lang="en-US" dirty="0"/>
           </a:p>
@@ -2926,7 +2928,7 @@
           <a:p>
             <a:r>
               <a:rPr lang="en-US" dirty="0"/>
-              <a:t>Let us copy the definitions. The key terms of this lesson are defined as follows. On this slide we have Crust and Lithosphere. Write each point on a new line, with the key term first, and explain it in your own words when we revise.</a:t>
+              <a:t>Let us copy the definitions. The key terms of this lesson are defined as follows. On this slide we have Internal structure of the Earth and Lithosphere. Write each point on a new line, with the key term first, and explain it in your own words when we revise.</a:t>
             </a:r>
             <a:endParaRPr lang="en-US" dirty="0"/>
           </a:p>
@@ -3014,7 +3016,7 @@
           <a:p>
             <a:r>
               <a:rPr lang="en-US" dirty="0"/>
-              <a:t>Let us copy The Main Layers of the Earth. The Earth has the following main layers. On this slide we have Crust and Mantle. Write each point on a new line, with the key term first, and explain it in your own words when we revise. When you finish, we go to the next slide.</a:t>
+              <a:t>Let us copy The Crust. The first layer of the Earth is the crust. Copy the point on Crust on the left, then draw the diagram on the right: the layers of the Earth. Give it a title and label it clearly.</a:t>
             </a:r>
             <a:endParaRPr lang="en-US" dirty="0"/>
           </a:p>
@@ -3102,7 +3104,7 @@
           <a:p>
             <a:r>
               <a:rPr lang="en-US" dirty="0"/>
-              <a:t>We continue with The Main Layers of the Earth. On this slide we have Outer core and Inner core. Write each point on a new line, with the key term first, and explain it in your own words when we revise.</a:t>
+              <a:t>We continue with The Crust. On this slide we have Continental crust and Oceanic crust. Write each point on a new line, with the key term first, and explain it in your own words when we revise.</a:t>
             </a:r>
             <a:endParaRPr lang="en-US" dirty="0"/>
           </a:p>
@@ -3190,7 +3192,7 @@
           <a:p>
             <a:r>
               <a:rPr lang="en-US" dirty="0"/>
-              <a:t>Now draw this illustration in your notebook: the internal structure of the Earth. Give it a title and label it clearly.</a:t>
+              <a:t>Let us copy The Mantle. The second layer of the Earth is the mantle. Copy the point on Mantle on the left, then draw the diagram on the right: the thickness of the layers. Give it a title and label it clearly.</a:t>
             </a:r>
             <a:endParaRPr lang="en-US" dirty="0"/>
           </a:p>
@@ -3278,7 +3280,7 @@
           <a:p>
             <a:r>
               <a:rPr lang="en-US" dirty="0"/>
-              <a:t>Now let us check what you have understood. Question 1: Name the three main layers of the Earth. Answer in your exercise book.</a:t>
+              <a:t>Let us copy The Core. The centre of the Earth is the core. On this slide we have Outer core. Write each point on a new line, with the key term first, and explain it in your own words when we revise.</a:t>
             </a:r>
             <a:endParaRPr lang="en-US" dirty="0"/>
           </a:p>
@@ -3366,7 +3368,7 @@
           <a:p>
             <a:r>
               <a:rPr lang="en-US" dirty="0"/>
-              <a:t>The expected answer is: crust, mantle and core. If you got it right, well done.</a:t>
+              <a:t>Copy the point on Inner core on the left, then draw the diagram on the right: the internal structure of the Earth. Give it a title and label it clearly.</a:t>
             </a:r>
             <a:endParaRPr lang="en-US" dirty="0"/>
           </a:p>
@@ -3542,7 +3544,7 @@
           <a:p>
             <a:r>
               <a:rPr lang="en-US" dirty="0"/>
-              <a:t>Now let us check what you have understood. Question 2: Which layer do we live on? Answer in your exercise book.</a:t>
+              <a:t>Now let us check what you have understood. Question 1: Name the three main layers of the Earth. Answer in your exercise book.</a:t>
             </a:r>
             <a:endParaRPr lang="en-US" dirty="0"/>
           </a:p>
@@ -3630,7 +3632,7 @@
           <a:p>
             <a:r>
               <a:rPr lang="en-US" dirty="0"/>
-              <a:t>The expected answer is: the crust. If you got it right, well done.</a:t>
+              <a:t>The expected answer is: crust, mantle and core. If you got it right, well done.</a:t>
             </a:r>
             <a:endParaRPr lang="en-US" dirty="0"/>
           </a:p>
@@ -3718,7 +3720,7 @@
           <a:p>
             <a:r>
               <a:rPr lang="en-US" dirty="0"/>
-              <a:t>For those who need more practice, fill in the blanks in your exercise book. The answers are: number 1, crust; number 2, mantle; number 3, core.</a:t>
+              <a:t>Now let us check what you have understood. Question 2: Which layer do we live on? Answer in your exercise book.</a:t>
             </a:r>
             <a:endParaRPr lang="en-US" dirty="0"/>
           </a:p>
@@ -3806,7 +3808,7 @@
           <a:p>
             <a:r>
               <a:rPr lang="en-US" dirty="0"/>
-              <a:t>For your homework: Draw and label the internal structure of the Earth. We shall correct it at the beginning of our next lesson.</a:t>
+              <a:t>The expected answer is: the crust. If you got it right, well done.</a:t>
             </a:r>
             <a:endParaRPr lang="en-US" dirty="0"/>
           </a:p>
@@ -3894,7 +3896,7 @@
           <a:p>
             <a:r>
               <a:rPr lang="en-US" dirty="0"/>
-              <a:t>Our next lesson will be on Lesson 12: Plate Movements. Thank you for your attention, and see you next time.</a:t>
+              <a:t>For those who need more practice, fill in the blanks in your exercise book. The answers are: number 1, crust; number 2, mantle; number 3, core.</a:t>
             </a:r>
             <a:endParaRPr lang="en-US" dirty="0"/>
           </a:p>
@@ -3982,7 +3984,7 @@
           <a:p>
             <a:r>
               <a:rPr lang="en-US" dirty="0"/>
-              <a:t>Let us play the bilingual game. I say a word in English, and you give me the French word. Then we do the reverse.</a:t>
+              <a:t>For your homework: Draw and label the internal structure of the Earth. We shall correct it at the beginning of our next lesson.</a:t>
             </a:r>
             <a:endParaRPr lang="en-US" dirty="0"/>
           </a:p>
@@ -4070,7 +4072,7 @@
           <a:p>
             <a:r>
               <a:rPr lang="en-US" dirty="0"/>
-              <a:t>I record this information in the official logbook of the class after the lesson.</a:t>
+              <a:t>Our next lesson will be on Lesson 12: Plate Movements. Thank you for your attention, and see you next time.</a:t>
             </a:r>
             <a:endParaRPr lang="en-US" dirty="0"/>
           </a:p>
@@ -4158,7 +4160,7 @@
           <a:p>
             <a:r>
               <a:rPr lang="en-US" dirty="0"/>
-              <a:t>I complete the second page of the logbook: the matter taught, the evaluation, the homework and the attendance.</a:t>
+              <a:t>Let us play the bilingual game. I say a word in English, and you give me the French word. Then we do the reverse.</a:t>
             </a:r>
             <a:endParaRPr lang="en-US" dirty="0"/>
           </a:p>
@@ -4246,7 +4248,7 @@
           <a:p>
             <a:r>
               <a:rPr lang="en-US" dirty="0"/>
-              <a:t>This slide is for me, the teacher: it gives the timing of the lesson and what to do if the projector is not available.</a:t>
+              <a:t>I record this information in the official logbook of the class after the lesson.</a:t>
             </a:r>
             <a:endParaRPr lang="en-US" dirty="0"/>
           </a:p>
@@ -4334,7 +4336,7 @@
           <a:p>
             <a:r>
               <a:rPr lang="en-US" dirty="0"/>
-              <a:t>These are the references and picture credits used to prepare this lesson.</a:t>
+              <a:t>I complete the second page of the logbook: the matter taught, the evaluation, the homework and the attendance.</a:t>
             </a:r>
             <a:endParaRPr lang="en-US" dirty="0"/>
           </a:p>
@@ -4464,6 +4466,182 @@
 </p:notes>
 </file>
 
+<file path=ppt/notesSlides/notesSlide50.xml><?xml version="1.0" encoding="utf-8"?>
+<p:notes xmlns:a="http://schemas.openxmlformats.org/drawingml/2006/main" xmlns:r="http://schemas.openxmlformats.org/officeDocument/2006/relationships" xmlns:p="http://schemas.openxmlformats.org/presentationml/2006/main">
+  <p:cSld>
+    <p:spTree>
+      <p:nvGrpSpPr>
+        <p:cNvPr id="1" name=""/>
+        <p:cNvGrpSpPr/>
+        <p:nvPr/>
+      </p:nvGrpSpPr>
+      <p:grpSpPr>
+        <a:xfrm>
+          <a:off x="0" y="0"/>
+          <a:ext cx="0" cy="0"/>
+          <a:chOff x="0" y="0"/>
+          <a:chExt cx="0" cy="0"/>
+        </a:xfrm>
+      </p:grpSpPr>
+      <p:sp>
+        <p:nvSpPr>
+          <p:cNvPr id="2" name="Slide Image Placeholder 1"/>
+          <p:cNvSpPr>
+            <a:spLocks noGrp="1" noRot="1" noChangeAspect="1"/>
+          </p:cNvSpPr>
+          <p:nvPr>
+            <p:ph type="sldImg"/>
+          </p:nvPr>
+        </p:nvSpPr>
+        <p:spPr/>
+      </p:sp>
+      <p:sp>
+        <p:nvSpPr>
+          <p:cNvPr id="3" name="Notes Placeholder 2"/>
+          <p:cNvSpPr>
+            <a:spLocks noGrp="1"/>
+          </p:cNvSpPr>
+          <p:nvPr>
+            <p:ph type="body" idx="1"/>
+          </p:nvPr>
+        </p:nvSpPr>
+        <p:spPr/>
+        <p:txBody>
+          <a:bodyPr/>
+          <a:lstStyle/>
+          <a:p>
+            <a:r>
+              <a:rPr lang="en-US" dirty="0"/>
+              <a:t>This slide is for me, the teacher: it gives the timing of the lesson and what to do if the projector is not available.</a:t>
+            </a:r>
+            <a:endParaRPr lang="en-US" dirty="0"/>
+          </a:p>
+        </p:txBody>
+      </p:sp>
+      <p:sp>
+        <p:nvSpPr>
+          <p:cNvPr id="4" name="Slide Number Placeholder 3"/>
+          <p:cNvSpPr>
+            <a:spLocks noGrp="1"/>
+          </p:cNvSpPr>
+          <p:nvPr>
+            <p:ph type="sldNum" sz="quarter" idx="10"/>
+          </p:nvPr>
+        </p:nvSpPr>
+        <p:spPr/>
+        <p:txBody>
+          <a:bodyPr/>
+          <a:lstStyle/>
+          <a:p>
+            <a:fld id="{F7021451-1387-4CA6-816F-3879F97B5CBC}" type="slidenum">
+              <a:rPr lang="en-US"/>
+              <a:t>50</a:t>
+            </a:fld>
+            <a:endParaRPr lang="en-US"/>
+          </a:p>
+        </p:txBody>
+      </p:sp>
+    </p:spTree>
+    <p:extLst>
+      <p:ext uri="{BB962C8B-B14F-4D97-AF65-F5344CB8AC3E}">
+        <p14:creationId xmlns:p14="http://schemas.microsoft.com/office/powerpoint/2010/main" val="1024086991"/>
+      </p:ext>
+    </p:extLst>
+  </p:cSld>
+  <p:clrMapOvr>
+    <a:masterClrMapping/>
+  </p:clrMapOvr>
+</p:notes>
+</file>
+
+<file path=ppt/notesSlides/notesSlide51.xml><?xml version="1.0" encoding="utf-8"?>
+<p:notes xmlns:a="http://schemas.openxmlformats.org/drawingml/2006/main" xmlns:r="http://schemas.openxmlformats.org/officeDocument/2006/relationships" xmlns:p="http://schemas.openxmlformats.org/presentationml/2006/main">
+  <p:cSld>
+    <p:spTree>
+      <p:nvGrpSpPr>
+        <p:cNvPr id="1" name=""/>
+        <p:cNvGrpSpPr/>
+        <p:nvPr/>
+      </p:nvGrpSpPr>
+      <p:grpSpPr>
+        <a:xfrm>
+          <a:off x="0" y="0"/>
+          <a:ext cx="0" cy="0"/>
+          <a:chOff x="0" y="0"/>
+          <a:chExt cx="0" cy="0"/>
+        </a:xfrm>
+      </p:grpSpPr>
+      <p:sp>
+        <p:nvSpPr>
+          <p:cNvPr id="2" name="Slide Image Placeholder 1"/>
+          <p:cNvSpPr>
+            <a:spLocks noGrp="1" noRot="1" noChangeAspect="1"/>
+          </p:cNvSpPr>
+          <p:nvPr>
+            <p:ph type="sldImg"/>
+          </p:nvPr>
+        </p:nvSpPr>
+        <p:spPr/>
+      </p:sp>
+      <p:sp>
+        <p:nvSpPr>
+          <p:cNvPr id="3" name="Notes Placeholder 2"/>
+          <p:cNvSpPr>
+            <a:spLocks noGrp="1"/>
+          </p:cNvSpPr>
+          <p:nvPr>
+            <p:ph type="body" idx="1"/>
+          </p:nvPr>
+        </p:nvSpPr>
+        <p:spPr/>
+        <p:txBody>
+          <a:bodyPr/>
+          <a:lstStyle/>
+          <a:p>
+            <a:r>
+              <a:rPr lang="en-US" dirty="0"/>
+              <a:t>These are the references and picture credits used to prepare this lesson.</a:t>
+            </a:r>
+            <a:endParaRPr lang="en-US" dirty="0"/>
+          </a:p>
+        </p:txBody>
+      </p:sp>
+      <p:sp>
+        <p:nvSpPr>
+          <p:cNvPr id="4" name="Slide Number Placeholder 3"/>
+          <p:cNvSpPr>
+            <a:spLocks noGrp="1"/>
+          </p:cNvSpPr>
+          <p:nvPr>
+            <p:ph type="sldNum" sz="quarter" idx="10"/>
+          </p:nvPr>
+        </p:nvSpPr>
+        <p:spPr/>
+        <p:txBody>
+          <a:bodyPr/>
+          <a:lstStyle/>
+          <a:p>
+            <a:fld id="{F7021451-1387-4CA6-816F-3879F97B5CBC}" type="slidenum">
+              <a:rPr lang="en-US"/>
+              <a:t>51</a:t>
+            </a:fld>
+            <a:endParaRPr lang="en-US"/>
+          </a:p>
+        </p:txBody>
+      </p:sp>
+    </p:spTree>
+    <p:extLst>
+      <p:ext uri="{BB962C8B-B14F-4D97-AF65-F5344CB8AC3E}">
+        <p14:creationId xmlns:p14="http://schemas.microsoft.com/office/powerpoint/2010/main" val="1024086991"/>
+      </p:ext>
+    </p:extLst>
+  </p:cSld>
+  <p:clrMapOvr>
+    <a:masterClrMapping/>
+  </p:clrMapOvr>
+</p:notes>
+</file>
+
 <file path=ppt/notesSlides/notesSlide6.xml><?xml version="1.0" encoding="utf-8"?>
 <p:notes xmlns:a="http://schemas.openxmlformats.org/drawingml/2006/main" xmlns:r="http://schemas.openxmlformats.org/officeDocument/2006/relationships" xmlns:p="http://schemas.openxmlformats.org/presentationml/2006/main">
   <p:cSld>
@@ -4686,7 +4864,7 @@
           <a:p>
             <a:r>
               <a:rPr lang="en-US" dirty="0"/>
-              <a:t>Let us first remember what you already know. The Earth is round like a ball. Volcanoes bring hot rock from inside the Earth. An egg has a shell, white and yolk. Keep this in mind, because we shall build on it today.</a:t>
+              <a:t>Let us first remember what you already know. The Earth is round like a ball. Volcanoes bring hot rock from inside the Earth. An egg has a shell, a white and a yolk. Keep this in mind, because we shall build on it today.</a:t>
             </a:r>
             <a:endParaRPr lang="en-US" dirty="0"/>
           </a:p>
@@ -4774,7 +4952,7 @@
           <a:p>
             <a:r>
               <a:rPr lang="en-US" dirty="0"/>
-              <a:t>Listen carefully to this situation from real life. Moussa cuts a boiled egg in two. He sees a thin shell, the white and a yellow yolk in the centre. His teacher tells him that the Earth also has layers like the egg. Think about it, because I am going to ask you some questions.</a:t>
+              <a:t>Listen carefully to this situation from real life. Moussa cuts a boiled egg in two. He sees a thin shell, the white and a yellow yolk in the centre. His teacher says that the Earth also has layers like the egg. Moussa asks: "What are the layers inside the Earth?" Think about it, because I am going to ask you some questions.</a:t>
             </a:r>
             <a:endParaRPr lang="en-US" dirty="0"/>
           </a:p>
@@ -6457,7 +6635,7 @@
                 <a:ea typeface="Times New Roman" pitchFamily="34" charset="-122"/>
                 <a:cs typeface="Times New Roman" pitchFamily="34" charset="-120"/>
               </a:rPr>
-              <a:t>Moussa wants to know the layers inside the Earth.</a:t>
+              <a:t>Moussa does not know the layers inside the Earth.</a:t>
             </a:r>
             <a:endParaRPr lang="en-US" sz="4000" dirty="0"/>
           </a:p>
@@ -7985,7 +8163,7 @@
                 <a:ea typeface="Times New Roman" pitchFamily="34" charset="-122"/>
                 <a:cs typeface="Times New Roman" pitchFamily="34" charset="-120"/>
               </a:rPr>
-              <a:t>Rocks and soil of the crust.</a:t>
+              <a:t>Rocks and soil.</a:t>
             </a:r>
             <a:endParaRPr lang="en-US" sz="1800" dirty="0"/>
           </a:p>
@@ -8204,7 +8382,7 @@
                 <a:ea typeface="Times New Roman" pitchFamily="34" charset="-122"/>
                 <a:cs typeface="Times New Roman" pitchFamily="34" charset="-120"/>
               </a:rPr>
-              <a:t>What is the crust?</a:t>
+              <a:t>On which layer of the Earth do we live?</a:t>
             </a:r>
             <a:endParaRPr lang="en-US" sz="4000" dirty="0"/>
           </a:p>
@@ -9018,7 +9196,7 @@
                 <a:ea typeface="Times New Roman" pitchFamily="34" charset="-122"/>
                 <a:cs typeface="Times New Roman" pitchFamily="34" charset="-120"/>
               </a:rPr>
-              <a:t>It is the thin, solid outer layer of the Earth on which we live.</a:t>
+              <a:t>On the crust, the thin and solid outer layer.</a:t>
             </a:r>
             <a:endParaRPr lang="en-US" sz="4000" dirty="0"/>
           </a:p>
@@ -9130,7 +9308,7 @@
                 <a:ea typeface="Calibri" pitchFamily="34" charset="-122"/>
                 <a:cs typeface="Calibri" pitchFamily="34" charset="-120"/>
               </a:rPr>
-              <a:t>2. THE LAYERS</a:t>
+              <a:t>2. THE MANTLE</a:t>
             </a:r>
             <a:endParaRPr lang="en-US" sz="1400" dirty="0"/>
           </a:p>
@@ -9177,7 +9355,7 @@
       </p:sp>
       <p:pic>
         <p:nvPicPr>
-          <p:cNvPr id="4" name="Image 0" descr="/home/claude/f4/img/v2/earth_layers_big.png">    </p:cNvPr>
+          <p:cNvPr id="4" name="Image 0" descr="/home/claude/f4/img/v2/f4_eruption.jpg">    </p:cNvPr>
           <p:cNvPicPr>
             <a:picLocks noChangeAspect="1"/>
           </p:cNvPicPr>
@@ -9191,8 +9369,8 @@
         </p:blipFill>
         <p:spPr>
           <a:xfrm>
-            <a:off x="629930" y="1783080"/>
-            <a:ext cx="10931835" cy="4270248"/>
+            <a:off x="2246610" y="1783080"/>
+            <a:ext cx="7698475" cy="4270248"/>
           </a:xfrm>
           <a:prstGeom prst="rect">
             <a:avLst/>
@@ -9232,7 +9410,7 @@
                 <a:ea typeface="Times New Roman" pitchFamily="34" charset="-122"/>
                 <a:cs typeface="Times New Roman" pitchFamily="34" charset="-120"/>
               </a:rPr>
-              <a:t>The layers of the Earth.</a:t>
+              <a:t>Lava coming out of a volcano.</a:t>
             </a:r>
             <a:endParaRPr lang="en-US" sz="1800" dirty="0"/>
           </a:p>
@@ -9344,7 +9522,7 @@
                 <a:ea typeface="Calibri" pitchFamily="34" charset="-122"/>
                 <a:cs typeface="Calibri" pitchFamily="34" charset="-120"/>
               </a:rPr>
-              <a:t>2. THE LAYERS</a:t>
+              <a:t>2. THE MANTLE</a:t>
             </a:r>
             <a:endParaRPr lang="en-US" sz="1400" dirty="0"/>
           </a:p>
@@ -9451,7 +9629,7 @@
                 <a:ea typeface="Times New Roman" pitchFamily="34" charset="-122"/>
                 <a:cs typeface="Times New Roman" pitchFamily="34" charset="-120"/>
               </a:rPr>
-              <a:t>Name the three main layers of the Earth from the surface to the centre.</a:t>
+              <a:t>Where does the hot lava of volcanoes come from?</a:t>
             </a:r>
             <a:endParaRPr lang="en-US" sz="4000" dirty="0"/>
           </a:p>
@@ -9563,7 +9741,7 @@
                 <a:ea typeface="Calibri" pitchFamily="34" charset="-122"/>
                 <a:cs typeface="Calibri" pitchFamily="34" charset="-120"/>
               </a:rPr>
-              <a:t>2. THE LAYERS</a:t>
+              <a:t>2. THE MANTLE</a:t>
             </a:r>
             <a:endParaRPr lang="en-US" sz="1400" dirty="0"/>
           </a:p>
@@ -9670,7 +9848,7 @@
                 <a:ea typeface="Times New Roman" pitchFamily="34" charset="-122"/>
                 <a:cs typeface="Times New Roman" pitchFamily="34" charset="-120"/>
               </a:rPr>
-              <a:t>The crust, the mantle and the core.</a:t>
+              <a:t>From the very hot mantle under the crust.</a:t>
             </a:r>
             <a:endParaRPr lang="en-US" sz="4000" dirty="0"/>
           </a:p>
@@ -9782,7 +9960,7 @@
                 <a:ea typeface="Calibri" pitchFamily="34" charset="-122"/>
                 <a:cs typeface="Calibri" pitchFamily="34" charset="-120"/>
               </a:rPr>
-              <a:t>2. THE MANTLE</a:t>
+              <a:t>3. THE CORE</a:t>
             </a:r>
             <a:endParaRPr lang="en-US" sz="1400" dirty="0"/>
           </a:p>
@@ -9829,7 +10007,7 @@
       </p:sp>
       <p:pic>
         <p:nvPicPr>
-          <p:cNvPr id="4" name="Image 0" descr="/home/claude/f4/img/v2/f4_eruption.jpg">    </p:cNvPr>
+          <p:cNvPr id="4" name="Image 0" descr="/home/claude/f4/img/v2/earth_depth.gif">    </p:cNvPr>
           <p:cNvPicPr>
             <a:picLocks noChangeAspect="1"/>
           </p:cNvPicPr>
@@ -9843,8 +10021,8 @@
         </p:blipFill>
         <p:spPr>
           <a:xfrm>
-            <a:off x="2246610" y="1783080"/>
-            <a:ext cx="7698475" cy="4270248"/>
+            <a:off x="629930" y="1783080"/>
+            <a:ext cx="10931835" cy="4270248"/>
           </a:xfrm>
           <a:prstGeom prst="rect">
             <a:avLst/>
@@ -9884,7 +10062,7 @@
                 <a:ea typeface="Times New Roman" pitchFamily="34" charset="-122"/>
                 <a:cs typeface="Times New Roman" pitchFamily="34" charset="-120"/>
               </a:rPr>
-              <a:t>Lava coming out of a volcano.</a:t>
+              <a:t>Animation: a journey to the centre of the Earth.</a:t>
             </a:r>
             <a:endParaRPr lang="en-US" sz="1800" dirty="0"/>
           </a:p>
@@ -9996,7 +10174,7 @@
                 <a:ea typeface="Calibri" pitchFamily="34" charset="-122"/>
                 <a:cs typeface="Calibri" pitchFamily="34" charset="-120"/>
               </a:rPr>
-              <a:t>2. THE MANTLE</a:t>
+              <a:t>3. THE CORE</a:t>
             </a:r>
             <a:endParaRPr lang="en-US" sz="1400" dirty="0"/>
           </a:p>
@@ -10103,7 +10281,7 @@
                 <a:ea typeface="Times New Roman" pitchFamily="34" charset="-122"/>
                 <a:cs typeface="Times New Roman" pitchFamily="34" charset="-120"/>
               </a:rPr>
-              <a:t>Where does the hot lava of volcanoes come from?</a:t>
+              <a:t>What do we find at the centre of the Earth?</a:t>
             </a:r>
             <a:endParaRPr lang="en-US" sz="4000" dirty="0"/>
           </a:p>
@@ -10215,7 +10393,7 @@
                 <a:ea typeface="Calibri" pitchFamily="34" charset="-122"/>
                 <a:cs typeface="Calibri" pitchFamily="34" charset="-120"/>
               </a:rPr>
-              <a:t>2. THE MANTLE</a:t>
+              <a:t>3. THE CORE</a:t>
             </a:r>
             <a:endParaRPr lang="en-US" sz="1400" dirty="0"/>
           </a:p>
@@ -10322,7 +10500,7 @@
                 <a:ea typeface="Times New Roman" pitchFamily="34" charset="-122"/>
                 <a:cs typeface="Times New Roman" pitchFamily="34" charset="-120"/>
               </a:rPr>
-              <a:t>From the hot mantle under the crust.</a:t>
+              <a:t>The core, made mainly of very hot iron and nickel.</a:t>
             </a:r>
             <a:endParaRPr lang="en-US" sz="4000" dirty="0"/>
           </a:p>
@@ -10434,7 +10612,7 @@
                 <a:ea typeface="Calibri" pitchFamily="34" charset="-122"/>
                 <a:cs typeface="Calibri" pitchFamily="34" charset="-120"/>
               </a:rPr>
-              <a:t>2. THE CORE</a:t>
+              <a:t>4. ILLUSTRATION</a:t>
             </a:r>
             <a:endParaRPr lang="en-US" sz="1400" dirty="0"/>
           </a:p>
@@ -10481,7 +10659,7 @@
       </p:sp>
       <p:pic>
         <p:nvPicPr>
-          <p:cNvPr id="4" name="Image 0" descr="/home/claude/f4/img/v2/earth_depth.gif">    </p:cNvPr>
+          <p:cNvPr id="4" name="Image 0" descr="/home/claude/f4/img/v2/earth_layers_big.png">    </p:cNvPr>
           <p:cNvPicPr>
             <a:picLocks noChangeAspect="1"/>
           </p:cNvPicPr>
@@ -10536,7 +10714,7 @@
                 <a:ea typeface="Times New Roman" pitchFamily="34" charset="-122"/>
                 <a:cs typeface="Times New Roman" pitchFamily="34" charset="-120"/>
               </a:rPr>
-              <a:t>Animation: a journey to the centre of the Earth.</a:t>
+              <a:t>A cut through the Earth.</a:t>
             </a:r>
             <a:endParaRPr lang="en-US" sz="1800" dirty="0"/>
           </a:p>
@@ -10648,7 +10826,7 @@
                 <a:ea typeface="Calibri" pitchFamily="34" charset="-122"/>
                 <a:cs typeface="Calibri" pitchFamily="34" charset="-120"/>
               </a:rPr>
-              <a:t>2. THE CORE</a:t>
+              <a:t>4. ILLUSTRATION</a:t>
             </a:r>
             <a:endParaRPr lang="en-US" sz="1400" dirty="0"/>
           </a:p>
@@ -10755,7 +10933,7 @@
                 <a:ea typeface="Times New Roman" pitchFamily="34" charset="-122"/>
                 <a:cs typeface="Times New Roman" pitchFamily="34" charset="-120"/>
               </a:rPr>
-              <a:t>What is the core made of?</a:t>
+              <a:t>How many main layers can you see in this cut through the Earth?</a:t>
             </a:r>
             <a:endParaRPr lang="en-US" sz="4000" dirty="0"/>
           </a:p>
@@ -10867,7 +11045,7 @@
                 <a:ea typeface="Calibri" pitchFamily="34" charset="-122"/>
                 <a:cs typeface="Calibri" pitchFamily="34" charset="-120"/>
               </a:rPr>
-              <a:t>2. THE CORE</a:t>
+              <a:t>4. ILLUSTRATION</a:t>
             </a:r>
             <a:endParaRPr lang="en-US" sz="1400" dirty="0"/>
           </a:p>
@@ -10974,7 +11152,7 @@
                 <a:ea typeface="Times New Roman" pitchFamily="34" charset="-122"/>
                 <a:cs typeface="Times New Roman" pitchFamily="34" charset="-120"/>
               </a:rPr>
-              <a:t>Mainly iron and nickel, very hot; the outer core is liquid and the inner core is solid.</a:t>
+              <a:t>Three: the crust, the mantle and the core.</a:t>
             </a:r>
             <a:endParaRPr lang="en-US" sz="4000" dirty="0"/>
           </a:p>
@@ -11657,7 +11835,7 @@
                           <a:ea typeface="Calibri" pitchFamily="34" charset="-122"/>
                           <a:cs typeface="Calibri" pitchFamily="34" charset="-120"/>
                         </a:rPr>
-                        <a:t>Crust, mantle, core, lithosphere.</a:t>
+                        <a:t>Lithosphere, plate motion, tectonic movements.</a:t>
                       </a:r>
                       <a:endParaRPr lang="en-US" sz="1700" dirty="0">
                         <a:latin typeface="Calibri" charset="0"/>
@@ -11795,7 +11973,7 @@
                           <a:ea typeface="Calibri" pitchFamily="34" charset="-122"/>
                           <a:cs typeface="Calibri" pitchFamily="34" charset="-120"/>
                         </a:rPr>
-                        <a:t>The crust, the mantle and the core (identification and illustration only).</a:t>
+                        <a:t>The crust; the mantle; the core (identification and illustration only).</a:t>
                       </a:r>
                       <a:endParaRPr lang="en-US" sz="1700" dirty="0">
                         <a:latin typeface="Calibri" charset="0"/>
@@ -12095,7 +12273,7 @@
                 <a:ea typeface="Calibri" pitchFamily="34" charset="-122"/>
                 <a:cs typeface="Calibri" pitchFamily="34" charset="-120"/>
               </a:rPr>
-              <a:t>3. ILLUSTRATION</a:t>
+              <a:t>4. ILLUSTRATION</a:t>
             </a:r>
             <a:endParaRPr lang="en-US" sz="1400" dirty="0"/>
           </a:p>
@@ -12197,7 +12375,7 @@
                 <a:ea typeface="Times New Roman" pitchFamily="34" charset="-122"/>
                 <a:cs typeface="Times New Roman" pitchFamily="34" charset="-120"/>
               </a:rPr>
-              <a:t>Boundaries between the layers.</a:t>
+              <a:t>The thickness of the layers.</a:t>
             </a:r>
             <a:endParaRPr lang="en-US" sz="1800" dirty="0"/>
           </a:p>
@@ -12309,7 +12487,7 @@
                 <a:ea typeface="Calibri" pitchFamily="34" charset="-122"/>
                 <a:cs typeface="Calibri" pitchFamily="34" charset="-120"/>
               </a:rPr>
-              <a:t>3. ILLUSTRATION</a:t>
+              <a:t>4. ILLUSTRATION</a:t>
             </a:r>
             <a:endParaRPr lang="en-US" sz="1400" dirty="0"/>
           </a:p>
@@ -12528,7 +12706,7 @@
                 <a:ea typeface="Calibri" pitchFamily="34" charset="-122"/>
                 <a:cs typeface="Calibri" pitchFamily="34" charset="-120"/>
               </a:rPr>
-              <a:t>3. ILLUSTRATION</a:t>
+              <a:t>4. ILLUSTRATION</a:t>
             </a:r>
             <a:endParaRPr lang="en-US" sz="1400" dirty="0"/>
           </a:p>
@@ -13029,7 +13207,7 @@
         <p:spPr>
           <a:xfrm>
             <a:off x="0" y="658368"/>
-            <a:ext cx="3840480" cy="5833872"/>
+            <a:ext cx="1463040" cy="5833872"/>
           </a:xfrm>
           <a:prstGeom prst="rect">
             <a:avLst/>
@@ -13044,8 +13222,8 @@
         </p:nvSpPr>
         <p:spPr>
           <a:xfrm>
-            <a:off x="4069080" y="1005840"/>
-            <a:ext cx="7802575" cy="731520"/>
+            <a:off x="1691640" y="1005840"/>
+            <a:ext cx="10180015" cy="731520"/>
           </a:xfrm>
           <a:prstGeom prst="rect">
             <a:avLst/>
@@ -13085,8 +13263,8 @@
         </p:nvSpPr>
         <p:spPr>
           <a:xfrm>
-            <a:off x="4069080" y="1783080"/>
-            <a:ext cx="7802575" cy="4663440"/>
+            <a:off x="1691640" y="1783080"/>
+            <a:ext cx="10180015" cy="4663440"/>
           </a:xfrm>
           <a:prstGeom prst="rect">
             <a:avLst/>
@@ -13133,7 +13311,7 @@
                 <a:ea typeface="Times New Roman" pitchFamily="34" charset="-122"/>
                 <a:cs typeface="Times New Roman" pitchFamily="34" charset="-120"/>
               </a:rPr>
-              <a:t>Crust: </a:t>
+              <a:t>Internal structure of the Earth: </a:t>
             </a:r>
             <a:pPr algn="l" indent="0" marL="0">
               <a:spcAft>
@@ -13150,7 +13328,7 @@
                 <a:ea typeface="Times New Roman" pitchFamily="34" charset="-122"/>
                 <a:cs typeface="Times New Roman" pitchFamily="34" charset="-120"/>
               </a:rPr>
-              <a:t>It is the thin, solid outer layer of the Earth.</a:t>
+              <a:t>It is the arrangement of the layers inside the Earth.</a:t>
             </a:r>
             <a:endParaRPr lang="en-US" sz="4000" dirty="0"/>
           </a:p>
@@ -13305,9 +13483,129 @@
           </a:p>
         </p:txBody>
       </p:sp>
+      <p:sp>
+        <p:nvSpPr>
+          <p:cNvPr id="3" name="Text 1"/>
+          <p:cNvSpPr/>
+          <p:nvPr/>
+        </p:nvSpPr>
+        <p:spPr>
+          <a:xfrm>
+            <a:off x="365760" y="1005840"/>
+            <a:ext cx="11460175" cy="731520"/>
+          </a:xfrm>
+          <a:prstGeom prst="rect">
+            <a:avLst/>
+          </a:prstGeom>
+          <a:noFill/>
+          <a:ln/>
+        </p:spPr>
+        <p:txBody>
+          <a:bodyPr wrap="square" lIns="0" tIns="0" rIns="0" bIns="0" rtlCol="0" anchor="ctr">
+            <a:normAutofit/>
+          </a:bodyPr>
+          <a:lstStyle/>
+          <a:p>
+            <a:pPr algn="ctr" indent="0" marL="0">
+              <a:buNone/>
+            </a:pPr>
+            <a:r>
+              <a:rPr lang="en-US" sz="3600" b="1" dirty="0">
+                <a:solidFill>
+                  <a:srgbClr val="990011"/>
+                </a:solidFill>
+                <a:latin typeface="Times New Roman" pitchFamily="34" charset="0"/>
+                <a:ea typeface="Times New Roman" pitchFamily="34" charset="-122"/>
+                <a:cs typeface="Times New Roman" pitchFamily="34" charset="-120"/>
+              </a:rPr>
+              <a:t>1. The Crust</a:t>
+            </a:r>
+            <a:endParaRPr lang="en-US" sz="3600" dirty="0"/>
+          </a:p>
+        </p:txBody>
+      </p:sp>
+      <p:sp>
+        <p:nvSpPr>
+          <p:cNvPr id="4" name="Text 2"/>
+          <p:cNvSpPr/>
+          <p:nvPr/>
+        </p:nvSpPr>
+        <p:spPr>
+          <a:xfrm>
+            <a:off x="365760" y="1783080"/>
+            <a:ext cx="4846320" cy="4617720"/>
+          </a:xfrm>
+          <a:prstGeom prst="rect">
+            <a:avLst/>
+          </a:prstGeom>
+          <a:noFill/>
+          <a:ln/>
+        </p:spPr>
+        <p:txBody>
+          <a:bodyPr wrap="square" lIns="0" tIns="0" rIns="0" bIns="0" rtlCol="0" anchor="t"/>
+          <a:lstStyle/>
+          <a:p>
+            <a:pPr algn="l" indent="0" marL="0">
+              <a:spcAft>
+                <a:spcPts val="800"/>
+              </a:spcAft>
+              <a:buNone/>
+            </a:pPr>
+            <a:r>
+              <a:rPr lang="en-US" sz="3600" i="1" dirty="0">
+                <a:solidFill>
+                  <a:srgbClr val="111111"/>
+                </a:solidFill>
+                <a:latin typeface="Times New Roman" pitchFamily="34" charset="0"/>
+                <a:ea typeface="Times New Roman" pitchFamily="34" charset="-122"/>
+                <a:cs typeface="Times New Roman" pitchFamily="34" charset="-120"/>
+              </a:rPr>
+              <a:t>The first layer of the Earth is the crust:</a:t>
+            </a:r>
+            <a:endParaRPr lang="en-US" sz="3600" dirty="0"/>
+          </a:p>
+          <a:p>
+            <a:pPr algn="l" indent="0" marL="0">
+              <a:spcAft>
+                <a:spcPts val="800"/>
+              </a:spcAft>
+              <a:buNone/>
+            </a:pPr>
+            <a:r>
+              <a:rPr lang="en-US" sz="3600" b="1" dirty="0">
+                <a:solidFill>
+                  <a:srgbClr val="111111"/>
+                </a:solidFill>
+                <a:latin typeface="Times New Roman" pitchFamily="34" charset="0"/>
+                <a:ea typeface="Times New Roman" pitchFamily="34" charset="-122"/>
+                <a:cs typeface="Times New Roman" pitchFamily="34" charset="-120"/>
+              </a:rPr>
+              <a:t>Crust: </a:t>
+            </a:r>
+            <a:pPr algn="l" indent="0" marL="0">
+              <a:spcAft>
+                <a:spcPts val="800"/>
+              </a:spcAft>
+              <a:buNone/>
+            </a:pPr>
+            <a:r>
+              <a:rPr lang="en-US" sz="3600" dirty="0">
+                <a:solidFill>
+                  <a:srgbClr val="111111"/>
+                </a:solidFill>
+                <a:latin typeface="Times New Roman" pitchFamily="34" charset="0"/>
+                <a:ea typeface="Times New Roman" pitchFamily="34" charset="-122"/>
+                <a:cs typeface="Times New Roman" pitchFamily="34" charset="-120"/>
+              </a:rPr>
+              <a:t>It is the thin, solid, rocky layer on which we live. It is about 5 to 70 km thick.</a:t>
+            </a:r>
+            <a:endParaRPr lang="en-US" sz="3600" dirty="0"/>
+          </a:p>
+        </p:txBody>
+      </p:sp>
       <p:pic>
         <p:nvPicPr>
-          <p:cNvPr id="3" name="Image 0" descr="/home/claude/f4/img/minesec_sheet.png">    </p:cNvPr>
+          <p:cNvPr id="5" name="Image 0" descr="/home/claude/f4/img/v2/earth_layers_big.png">    </p:cNvPr>
           <p:cNvPicPr>
             <a:picLocks noChangeAspect="1"/>
           </p:cNvPicPr>
@@ -13321,8 +13619,8 @@
         </p:blipFill>
         <p:spPr>
           <a:xfrm>
-            <a:off x="0" y="658368"/>
-            <a:ext cx="2468880" cy="5833872"/>
+            <a:off x="5349240" y="2617506"/>
+            <a:ext cx="6659575" cy="2601397"/>
           </a:xfrm>
           <a:prstGeom prst="rect">
             <a:avLst/>
@@ -13331,14 +13629,14 @@
       </p:pic>
       <p:sp>
         <p:nvSpPr>
-          <p:cNvPr id="4" name="Text 1"/>
+          <p:cNvPr id="6" name="Text 3"/>
           <p:cNvSpPr/>
           <p:nvPr/>
         </p:nvSpPr>
         <p:spPr>
           <a:xfrm>
-            <a:off x="2697480" y="1005840"/>
-            <a:ext cx="9174175" cy="731520"/>
+            <a:off x="5349240" y="6089904"/>
+            <a:ext cx="6659575" cy="347472"/>
           </a:xfrm>
           <a:prstGeom prst="rect">
             <a:avLst/>
@@ -13347,142 +13645,24 @@
           <a:ln/>
         </p:spPr>
         <p:txBody>
-          <a:bodyPr wrap="square" lIns="0" tIns="0" rIns="0" bIns="0" rtlCol="0" anchor="ctr">
-            <a:normAutofit/>
-          </a:bodyPr>
+          <a:bodyPr wrap="square" lIns="0" tIns="0" rIns="0" bIns="0" rtlCol="0" anchor="ctr"/>
           <a:lstStyle/>
           <a:p>
             <a:pPr algn="ctr" indent="0" marL="0">
               <a:buNone/>
             </a:pPr>
             <a:r>
-              <a:rPr lang="en-US" sz="3600" b="1" dirty="0">
-                <a:solidFill>
-                  <a:srgbClr val="990011"/>
+              <a:rPr lang="en-US" sz="1600" i="1" dirty="0">
+                <a:solidFill>
+                  <a:srgbClr val="555555"/>
                 </a:solidFill>
                 <a:latin typeface="Times New Roman" pitchFamily="34" charset="0"/>
                 <a:ea typeface="Times New Roman" pitchFamily="34" charset="-122"/>
                 <a:cs typeface="Times New Roman" pitchFamily="34" charset="-120"/>
               </a:rPr>
-              <a:t>1. The Main Layers of the Earth</a:t>
-            </a:r>
-            <a:endParaRPr lang="en-US" sz="3600" dirty="0"/>
-          </a:p>
-        </p:txBody>
-      </p:sp>
-      <p:sp>
-        <p:nvSpPr>
-          <p:cNvPr id="5" name="Text 2"/>
-          <p:cNvSpPr/>
-          <p:nvPr/>
-        </p:nvSpPr>
-        <p:spPr>
-          <a:xfrm>
-            <a:off x="2697480" y="1783080"/>
-            <a:ext cx="9174175" cy="4663440"/>
-          </a:xfrm>
-          <a:prstGeom prst="rect">
-            <a:avLst/>
-          </a:prstGeom>
-          <a:noFill/>
-          <a:ln/>
-        </p:spPr>
-        <p:txBody>
-          <a:bodyPr wrap="square" lIns="0" tIns="0" rIns="0" bIns="0" rtlCol="0" anchor="t"/>
-          <a:lstStyle/>
-          <a:p>
-            <a:pPr algn="l" indent="0" marL="0">
-              <a:spcAft>
-                <a:spcPts val="800"/>
-              </a:spcAft>
-              <a:buNone/>
-            </a:pPr>
-            <a:r>
-              <a:rPr lang="en-US" sz="4000" i="1" dirty="0">
-                <a:solidFill>
-                  <a:srgbClr val="111111"/>
-                </a:solidFill>
-                <a:latin typeface="Times New Roman" pitchFamily="34" charset="0"/>
-                <a:ea typeface="Times New Roman" pitchFamily="34" charset="-122"/>
-                <a:cs typeface="Times New Roman" pitchFamily="34" charset="-120"/>
-              </a:rPr>
-              <a:t>The Earth has the following main layers:</a:t>
-            </a:r>
-            <a:endParaRPr lang="en-US" sz="4000" dirty="0"/>
-          </a:p>
-          <a:p>
-            <a:pPr algn="l" indent="0" marL="0">
-              <a:spcAft>
-                <a:spcPts val="800"/>
-              </a:spcAft>
-              <a:buNone/>
-            </a:pPr>
-            <a:r>
-              <a:rPr lang="en-US" sz="4000" b="1" dirty="0">
-                <a:solidFill>
-                  <a:srgbClr val="111111"/>
-                </a:solidFill>
-                <a:latin typeface="Times New Roman" pitchFamily="34" charset="0"/>
-                <a:ea typeface="Times New Roman" pitchFamily="34" charset="-122"/>
-                <a:cs typeface="Times New Roman" pitchFamily="34" charset="-120"/>
-              </a:rPr>
-              <a:t>Crust: </a:t>
-            </a:r>
-            <a:pPr algn="l" indent="0" marL="0">
-              <a:spcAft>
-                <a:spcPts val="800"/>
-              </a:spcAft>
-              <a:buNone/>
-            </a:pPr>
-            <a:r>
-              <a:rPr lang="en-US" sz="4000" dirty="0">
-                <a:solidFill>
-                  <a:srgbClr val="111111"/>
-                </a:solidFill>
-                <a:latin typeface="Times New Roman" pitchFamily="34" charset="0"/>
-                <a:ea typeface="Times New Roman" pitchFamily="34" charset="-122"/>
-                <a:cs typeface="Times New Roman" pitchFamily="34" charset="-120"/>
-              </a:rPr>
-              <a:t>It is the thin, rocky layer on which we live, from about 5 to 70 km thick.</a:t>
-            </a:r>
-            <a:endParaRPr lang="en-US" sz="4000" dirty="0"/>
-          </a:p>
-          <a:p>
-            <a:pPr algn="l" indent="0" marL="0">
-              <a:spcAft>
-                <a:spcPts val="800"/>
-              </a:spcAft>
-              <a:buNone/>
-            </a:pPr>
-            <a:r>
-              <a:rPr lang="en-US" sz="4000" b="1" dirty="0">
-                <a:solidFill>
-                  <a:srgbClr val="111111"/>
-                </a:solidFill>
-                <a:latin typeface="Times New Roman" pitchFamily="34" charset="0"/>
-                <a:ea typeface="Times New Roman" pitchFamily="34" charset="-122"/>
-                <a:cs typeface="Times New Roman" pitchFamily="34" charset="-120"/>
-              </a:rPr>
-              <a:t>Mantle: </a:t>
-            </a:r>
-            <a:pPr algn="l" indent="0" marL="0">
-              <a:spcAft>
-                <a:spcPts val="800"/>
-              </a:spcAft>
-              <a:buNone/>
-            </a:pPr>
-            <a:r>
-              <a:rPr lang="en-US" sz="4000" dirty="0">
-                <a:solidFill>
-                  <a:srgbClr val="111111"/>
-                </a:solidFill>
-                <a:latin typeface="Times New Roman" pitchFamily="34" charset="0"/>
-                <a:ea typeface="Times New Roman" pitchFamily="34" charset="-122"/>
-                <a:cs typeface="Times New Roman" pitchFamily="34" charset="-120"/>
-              </a:rPr>
-              <a:t>It is a thick layer of very hot rock, about 2,900 km thick.</a:t>
-            </a:r>
-            <a:endParaRPr lang="en-US" sz="4000" dirty="0"/>
+              <a:t>Illustration: the layers of the Earth</a:t>
+            </a:r>
+            <a:endParaRPr lang="en-US" sz="1600" dirty="0"/>
           </a:p>
         </p:txBody>
       </p:sp>
@@ -13657,7 +13837,7 @@
                 <a:ea typeface="Times New Roman" pitchFamily="34" charset="-122"/>
                 <a:cs typeface="Times New Roman" pitchFamily="34" charset="-120"/>
               </a:rPr>
-              <a:t>1. The Main Layers of the Earth (continued)</a:t>
+              <a:t>1. The Crust</a:t>
             </a:r>
             <a:endParaRPr lang="en-US" sz="3600" dirty="0"/>
           </a:p>
@@ -13699,7 +13879,7 @@
                 <a:ea typeface="Times New Roman" pitchFamily="34" charset="-122"/>
                 <a:cs typeface="Times New Roman" pitchFamily="34" charset="-120"/>
               </a:rPr>
-              <a:t>Outer core: </a:t>
+              <a:t>Continental crust: </a:t>
             </a:r>
             <a:pPr algn="l" indent="0" marL="0">
               <a:spcAft>
@@ -13716,7 +13896,7 @@
                 <a:ea typeface="Times New Roman" pitchFamily="34" charset="-122"/>
                 <a:cs typeface="Times New Roman" pitchFamily="34" charset="-120"/>
               </a:rPr>
-              <a:t>It is a layer of liquid iron and nickel.</a:t>
+              <a:t>It forms the continents and is thicker.</a:t>
             </a:r>
             <a:endParaRPr lang="en-US" sz="4000" dirty="0"/>
           </a:p>
@@ -13736,7 +13916,7 @@
                 <a:ea typeface="Times New Roman" pitchFamily="34" charset="-122"/>
                 <a:cs typeface="Times New Roman" pitchFamily="34" charset="-120"/>
               </a:rPr>
-              <a:t>Inner core: </a:t>
+              <a:t>Oceanic crust: </a:t>
             </a:r>
             <a:pPr algn="l" indent="0" marL="0">
               <a:spcAft>
@@ -13753,7 +13933,7 @@
                 <a:ea typeface="Times New Roman" pitchFamily="34" charset="-122"/>
                 <a:cs typeface="Times New Roman" pitchFamily="34" charset="-120"/>
               </a:rPr>
-              <a:t>It is the solid, very hot centre of the Earth.</a:t>
+              <a:t>It lies under the oceans and is thinner.</a:t>
             </a:r>
             <a:endParaRPr lang="en-US" sz="4000" dirty="0"/>
           </a:p>
@@ -13879,8 +14059,8 @@
         </p:nvSpPr>
         <p:spPr>
           <a:xfrm>
-            <a:off x="457200" y="1005840"/>
-            <a:ext cx="11277295" cy="731520"/>
+            <a:off x="365760" y="1005840"/>
+            <a:ext cx="11460175" cy="731520"/>
           </a:xfrm>
           <a:prstGeom prst="rect">
             <a:avLst/>
@@ -13889,7 +14069,9 @@
           <a:ln/>
         </p:spPr>
         <p:txBody>
-          <a:bodyPr wrap="square" lIns="0" tIns="0" rIns="0" bIns="0" rtlCol="0" anchor="ctr"/>
+          <a:bodyPr wrap="square" lIns="0" tIns="0" rIns="0" bIns="0" rtlCol="0" anchor="ctr">
+            <a:normAutofit/>
+          </a:bodyPr>
           <a:lstStyle/>
           <a:p>
             <a:pPr algn="ctr" indent="0" marL="0">
@@ -13904,7 +14086,86 @@
                 <a:ea typeface="Times New Roman" pitchFamily="34" charset="-122"/>
                 <a:cs typeface="Times New Roman" pitchFamily="34" charset="-120"/>
               </a:rPr>
-              <a:t>1. The Main Layers of the Earth</a:t>
+              <a:t>2. The Mantle</a:t>
+            </a:r>
+            <a:endParaRPr lang="en-US" sz="3600" dirty="0"/>
+          </a:p>
+        </p:txBody>
+      </p:sp>
+      <p:sp>
+        <p:nvSpPr>
+          <p:cNvPr id="4" name="Text 2"/>
+          <p:cNvSpPr/>
+          <p:nvPr/>
+        </p:nvSpPr>
+        <p:spPr>
+          <a:xfrm>
+            <a:off x="365760" y="1783080"/>
+            <a:ext cx="4846320" cy="4617720"/>
+          </a:xfrm>
+          <a:prstGeom prst="rect">
+            <a:avLst/>
+          </a:prstGeom>
+          <a:noFill/>
+          <a:ln/>
+        </p:spPr>
+        <p:txBody>
+          <a:bodyPr wrap="square" lIns="0" tIns="0" rIns="0" bIns="0" rtlCol="0" anchor="t"/>
+          <a:lstStyle/>
+          <a:p>
+            <a:pPr algn="l" indent="0" marL="0">
+              <a:spcAft>
+                <a:spcPts val="800"/>
+              </a:spcAft>
+              <a:buNone/>
+            </a:pPr>
+            <a:r>
+              <a:rPr lang="en-US" sz="3600" i="1" dirty="0">
+                <a:solidFill>
+                  <a:srgbClr val="111111"/>
+                </a:solidFill>
+                <a:latin typeface="Times New Roman" pitchFamily="34" charset="0"/>
+                <a:ea typeface="Times New Roman" pitchFamily="34" charset="-122"/>
+                <a:cs typeface="Times New Roman" pitchFamily="34" charset="-120"/>
+              </a:rPr>
+              <a:t>The second layer of the Earth is the mantle:</a:t>
+            </a:r>
+            <a:endParaRPr lang="en-US" sz="3600" dirty="0"/>
+          </a:p>
+          <a:p>
+            <a:pPr algn="l" indent="0" marL="0">
+              <a:spcAft>
+                <a:spcPts val="800"/>
+              </a:spcAft>
+              <a:buNone/>
+            </a:pPr>
+            <a:r>
+              <a:rPr lang="en-US" sz="3600" b="1" dirty="0">
+                <a:solidFill>
+                  <a:srgbClr val="111111"/>
+                </a:solidFill>
+                <a:latin typeface="Times New Roman" pitchFamily="34" charset="0"/>
+                <a:ea typeface="Times New Roman" pitchFamily="34" charset="-122"/>
+                <a:cs typeface="Times New Roman" pitchFamily="34" charset="-120"/>
+              </a:rPr>
+              <a:t>Mantle: </a:t>
+            </a:r>
+            <a:pPr algn="l" indent="0" marL="0">
+              <a:spcAft>
+                <a:spcPts val="800"/>
+              </a:spcAft>
+              <a:buNone/>
+            </a:pPr>
+            <a:r>
+              <a:rPr lang="en-US" sz="3600" dirty="0">
+                <a:solidFill>
+                  <a:srgbClr val="111111"/>
+                </a:solidFill>
+                <a:latin typeface="Times New Roman" pitchFamily="34" charset="0"/>
+                <a:ea typeface="Times New Roman" pitchFamily="34" charset="-122"/>
+                <a:cs typeface="Times New Roman" pitchFamily="34" charset="-120"/>
+              </a:rPr>
+              <a:t>It is a thick layer of very hot rock, about 2,900 km thick. The rock of its upper part moves very slowly.</a:t>
             </a:r>
             <a:endParaRPr lang="en-US" sz="3600" dirty="0"/>
           </a:p>
@@ -13912,7 +14173,7 @@
       </p:sp>
       <p:pic>
         <p:nvPicPr>
-          <p:cNvPr id="4" name="Image 0" descr="/home/claude/f4/img/v2/earth_layers_big.png">    </p:cNvPr>
+          <p:cNvPr id="5" name="Image 0" descr="/home/claude/f4/img/v2/earth_disc_big.png">    </p:cNvPr>
           <p:cNvPicPr>
             <a:picLocks noChangeAspect="1"/>
           </p:cNvPicPr>
@@ -13926,8 +14187,8 @@
         </p:blipFill>
         <p:spPr>
           <a:xfrm>
-            <a:off x="629930" y="1783080"/>
-            <a:ext cx="10931835" cy="4270248"/>
+            <a:off x="5349240" y="2617506"/>
+            <a:ext cx="6659575" cy="2601397"/>
           </a:xfrm>
           <a:prstGeom prst="rect">
             <a:avLst/>
@@ -13936,14 +14197,14 @@
       </p:pic>
       <p:sp>
         <p:nvSpPr>
-          <p:cNvPr id="5" name="Text 2"/>
+          <p:cNvPr id="6" name="Text 3"/>
           <p:cNvSpPr/>
           <p:nvPr/>
         </p:nvSpPr>
         <p:spPr>
           <a:xfrm>
-            <a:off x="457200" y="6089904"/>
-            <a:ext cx="11277295" cy="347472"/>
+            <a:off x="5349240" y="6089904"/>
+            <a:ext cx="6659575" cy="347472"/>
           </a:xfrm>
           <a:prstGeom prst="rect">
             <a:avLst/>
@@ -13959,7 +14220,7 @@
               <a:buNone/>
             </a:pPr>
             <a:r>
-              <a:rPr lang="en-US" sz="1800" i="1" dirty="0">
+              <a:rPr lang="en-US" sz="1600" i="1" dirty="0">
                 <a:solidFill>
                   <a:srgbClr val="555555"/>
                 </a:solidFill>
@@ -13967,9 +14228,9 @@
                 <a:ea typeface="Times New Roman" pitchFamily="34" charset="-122"/>
                 <a:cs typeface="Times New Roman" pitchFamily="34" charset="-120"/>
               </a:rPr>
-              <a:t>Illustration: the internal structure of the Earth</a:t>
-            </a:r>
-            <a:endParaRPr lang="en-US" sz="1800" dirty="0"/>
+              <a:t>Illustration: the thickness of the layers</a:t>
+            </a:r>
+            <a:endParaRPr lang="en-US" sz="1600" dirty="0"/>
           </a:p>
         </p:txBody>
       </p:sp>
@@ -14079,7 +14340,7 @@
                 <a:ea typeface="Calibri" pitchFamily="34" charset="-122"/>
                 <a:cs typeface="Calibri" pitchFamily="34" charset="-120"/>
               </a:rPr>
-              <a:t>FORMATIVE EVALUATION</a:t>
+              <a:t>BOARD SUMMARY</a:t>
             </a:r>
             <a:endParaRPr lang="en-US" sz="1400" dirty="0"/>
           </a:p>
@@ -14144,7 +14405,7 @@
                 <a:ea typeface="Times New Roman" pitchFamily="34" charset="-122"/>
                 <a:cs typeface="Times New Roman" pitchFamily="34" charset="-120"/>
               </a:rPr>
-              <a:t>Evaluation 1</a:t>
+              <a:t>3. The Core</a:t>
             </a:r>
             <a:endParaRPr lang="en-US" sz="3600" dirty="0"/>
           </a:p>
@@ -14178,7 +14439,7 @@
               <a:buNone/>
             </a:pPr>
             <a:r>
-              <a:rPr lang="en-US" sz="4000" dirty="0">
+              <a:rPr lang="en-US" sz="4000" i="1" dirty="0">
                 <a:solidFill>
                   <a:srgbClr val="111111"/>
                 </a:solidFill>
@@ -14186,7 +14447,44 @@
                 <a:ea typeface="Times New Roman" pitchFamily="34" charset="-122"/>
                 <a:cs typeface="Times New Roman" pitchFamily="34" charset="-120"/>
               </a:rPr>
-              <a:t>Name the three main layers of the Earth.</a:t>
+              <a:t>The centre of the Earth is the core:</a:t>
+            </a:r>
+            <a:endParaRPr lang="en-US" sz="4000" dirty="0"/>
+          </a:p>
+          <a:p>
+            <a:pPr algn="l" indent="0" marL="0">
+              <a:spcAft>
+                <a:spcPts val="800"/>
+              </a:spcAft>
+              <a:buNone/>
+            </a:pPr>
+            <a:r>
+              <a:rPr lang="en-US" sz="4000" b="1" dirty="0">
+                <a:solidFill>
+                  <a:srgbClr val="111111"/>
+                </a:solidFill>
+                <a:latin typeface="Times New Roman" pitchFamily="34" charset="0"/>
+                <a:ea typeface="Times New Roman" pitchFamily="34" charset="-122"/>
+                <a:cs typeface="Times New Roman" pitchFamily="34" charset="-120"/>
+              </a:rPr>
+              <a:t>Outer core: </a:t>
+            </a:r>
+            <a:pPr algn="l" indent="0" marL="0">
+              <a:spcAft>
+                <a:spcPts val="800"/>
+              </a:spcAft>
+              <a:buNone/>
+            </a:pPr>
+            <a:r>
+              <a:rPr lang="en-US" sz="4000" dirty="0">
+                <a:solidFill>
+                  <a:srgbClr val="111111"/>
+                </a:solidFill>
+                <a:latin typeface="Times New Roman" pitchFamily="34" charset="0"/>
+                <a:ea typeface="Times New Roman" pitchFamily="34" charset="-122"/>
+                <a:cs typeface="Times New Roman" pitchFamily="34" charset="-120"/>
+              </a:rPr>
+              <a:t>It is a layer of hot liquid iron and nickel.</a:t>
             </a:r>
             <a:endParaRPr lang="en-US" sz="4000" dirty="0"/>
           </a:p>
@@ -14298,15 +14596,115 @@
                 <a:ea typeface="Calibri" pitchFamily="34" charset="-122"/>
                 <a:cs typeface="Calibri" pitchFamily="34" charset="-120"/>
               </a:rPr>
-              <a:t>FORMATIVE EVALUATION</a:t>
+              <a:t>BOARD SUMMARY</a:t>
             </a:r>
             <a:endParaRPr lang="en-US" sz="1400" dirty="0"/>
+          </a:p>
+        </p:txBody>
+      </p:sp>
+      <p:sp>
+        <p:nvSpPr>
+          <p:cNvPr id="3" name="Text 1"/>
+          <p:cNvSpPr/>
+          <p:nvPr/>
+        </p:nvSpPr>
+        <p:spPr>
+          <a:xfrm>
+            <a:off x="365760" y="1005840"/>
+            <a:ext cx="11460175" cy="731520"/>
+          </a:xfrm>
+          <a:prstGeom prst="rect">
+            <a:avLst/>
+          </a:prstGeom>
+          <a:noFill/>
+          <a:ln/>
+        </p:spPr>
+        <p:txBody>
+          <a:bodyPr wrap="square" lIns="0" tIns="0" rIns="0" bIns="0" rtlCol="0" anchor="ctr">
+            <a:normAutofit/>
+          </a:bodyPr>
+          <a:lstStyle/>
+          <a:p>
+            <a:pPr algn="ctr" indent="0" marL="0">
+              <a:buNone/>
+            </a:pPr>
+            <a:r>
+              <a:rPr lang="en-US" sz="3600" b="1" dirty="0">
+                <a:solidFill>
+                  <a:srgbClr val="990011"/>
+                </a:solidFill>
+                <a:latin typeface="Times New Roman" pitchFamily="34" charset="0"/>
+                <a:ea typeface="Times New Roman" pitchFamily="34" charset="-122"/>
+                <a:cs typeface="Times New Roman" pitchFamily="34" charset="-120"/>
+              </a:rPr>
+              <a:t>3. The Core</a:t>
+            </a:r>
+            <a:endParaRPr lang="en-US" sz="3600" dirty="0"/>
+          </a:p>
+        </p:txBody>
+      </p:sp>
+      <p:sp>
+        <p:nvSpPr>
+          <p:cNvPr id="4" name="Text 2"/>
+          <p:cNvSpPr/>
+          <p:nvPr/>
+        </p:nvSpPr>
+        <p:spPr>
+          <a:xfrm>
+            <a:off x="365760" y="1783080"/>
+            <a:ext cx="4846320" cy="4617720"/>
+          </a:xfrm>
+          <a:prstGeom prst="rect">
+            <a:avLst/>
+          </a:prstGeom>
+          <a:noFill/>
+          <a:ln/>
+        </p:spPr>
+        <p:txBody>
+          <a:bodyPr wrap="square" lIns="0" tIns="0" rIns="0" bIns="0" rtlCol="0" anchor="t"/>
+          <a:lstStyle/>
+          <a:p>
+            <a:pPr algn="l" indent="0" marL="0">
+              <a:spcAft>
+                <a:spcPts val="800"/>
+              </a:spcAft>
+              <a:buNone/>
+            </a:pPr>
+            <a:r>
+              <a:rPr lang="en-US" sz="3600" b="1" dirty="0">
+                <a:solidFill>
+                  <a:srgbClr val="111111"/>
+                </a:solidFill>
+                <a:latin typeface="Times New Roman" pitchFamily="34" charset="0"/>
+                <a:ea typeface="Times New Roman" pitchFamily="34" charset="-122"/>
+                <a:cs typeface="Times New Roman" pitchFamily="34" charset="-120"/>
+              </a:rPr>
+              <a:t>Inner core: </a:t>
+            </a:r>
+            <a:pPr algn="l" indent="0" marL="0">
+              <a:spcAft>
+                <a:spcPts val="800"/>
+              </a:spcAft>
+              <a:buNone/>
+            </a:pPr>
+            <a:r>
+              <a:rPr lang="en-US" sz="3600" dirty="0">
+                <a:solidFill>
+                  <a:srgbClr val="111111"/>
+                </a:solidFill>
+                <a:latin typeface="Times New Roman" pitchFamily="34" charset="0"/>
+                <a:ea typeface="Times New Roman" pitchFamily="34" charset="-122"/>
+                <a:cs typeface="Times New Roman" pitchFamily="34" charset="-120"/>
+              </a:rPr>
+              <a:t>It is the solid, very hot centre of the Earth.</a:t>
+            </a:r>
+            <a:endParaRPr lang="en-US" sz="3600" dirty="0"/>
           </a:p>
         </p:txBody>
       </p:sp>
       <p:pic>
         <p:nvPicPr>
-          <p:cNvPr id="3" name="Image 0" descr="/home/claude/f4/img/minesec_sheet.png">    </p:cNvPr>
+          <p:cNvPr id="5" name="Image 0" descr="/home/claude/f4/img/v2/earth_layers_big.png">    </p:cNvPr>
           <p:cNvPicPr>
             <a:picLocks noChangeAspect="1"/>
           </p:cNvPicPr>
@@ -14320,8 +14718,8 @@
         </p:blipFill>
         <p:spPr>
           <a:xfrm>
-            <a:off x="0" y="658368"/>
-            <a:ext cx="5120640" cy="5833872"/>
+            <a:off x="5349240" y="2617506"/>
+            <a:ext cx="6659575" cy="2601397"/>
           </a:xfrm>
           <a:prstGeom prst="rect">
             <a:avLst/>
@@ -14330,14 +14728,14 @@
       </p:pic>
       <p:sp>
         <p:nvSpPr>
-          <p:cNvPr id="4" name="Text 1"/>
+          <p:cNvPr id="6" name="Text 3"/>
           <p:cNvSpPr/>
           <p:nvPr/>
         </p:nvSpPr>
         <p:spPr>
           <a:xfrm>
-            <a:off x="5349240" y="1005840"/>
-            <a:ext cx="6522415" cy="731520"/>
+            <a:off x="5349240" y="6089904"/>
+            <a:ext cx="6659575" cy="347472"/>
           </a:xfrm>
           <a:prstGeom prst="rect">
             <a:avLst/>
@@ -14346,68 +14744,24 @@
           <a:ln/>
         </p:spPr>
         <p:txBody>
-          <a:bodyPr wrap="square" lIns="0" tIns="0" rIns="0" bIns="0" rtlCol="0" anchor="ctr">
-            <a:normAutofit/>
-          </a:bodyPr>
+          <a:bodyPr wrap="square" lIns="0" tIns="0" rIns="0" bIns="0" rtlCol="0" anchor="ctr"/>
           <a:lstStyle/>
           <a:p>
             <a:pPr algn="ctr" indent="0" marL="0">
               <a:buNone/>
             </a:pPr>
             <a:r>
-              <a:rPr lang="en-US" sz="3600" b="1" dirty="0">
-                <a:solidFill>
-                  <a:srgbClr val="990011"/>
+              <a:rPr lang="en-US" sz="1600" i="1" dirty="0">
+                <a:solidFill>
+                  <a:srgbClr val="555555"/>
                 </a:solidFill>
                 <a:latin typeface="Times New Roman" pitchFamily="34" charset="0"/>
                 <a:ea typeface="Times New Roman" pitchFamily="34" charset="-122"/>
                 <a:cs typeface="Times New Roman" pitchFamily="34" charset="-120"/>
               </a:rPr>
-              <a:t>Expected Answer</a:t>
-            </a:r>
-            <a:endParaRPr lang="en-US" sz="3600" dirty="0"/>
-          </a:p>
-        </p:txBody>
-      </p:sp>
-      <p:sp>
-        <p:nvSpPr>
-          <p:cNvPr id="5" name="Text 2"/>
-          <p:cNvSpPr/>
-          <p:nvPr/>
-        </p:nvSpPr>
-        <p:spPr>
-          <a:xfrm>
-            <a:off x="5349240" y="1783080"/>
-            <a:ext cx="6522415" cy="4663440"/>
-          </a:xfrm>
-          <a:prstGeom prst="rect">
-            <a:avLst/>
-          </a:prstGeom>
-          <a:noFill/>
-          <a:ln/>
-        </p:spPr>
-        <p:txBody>
-          <a:bodyPr wrap="square" lIns="0" tIns="0" rIns="0" bIns="0" rtlCol="0" anchor="t"/>
-          <a:lstStyle/>
-          <a:p>
-            <a:pPr algn="l" indent="0" marL="0">
-              <a:spcAft>
-                <a:spcPts val="800"/>
-              </a:spcAft>
-              <a:buNone/>
-            </a:pPr>
-            <a:r>
-              <a:rPr lang="en-US" sz="4000" dirty="0">
-                <a:solidFill>
-                  <a:srgbClr val="111111"/>
-                </a:solidFill>
-                <a:latin typeface="Times New Roman" pitchFamily="34" charset="0"/>
-                <a:ea typeface="Times New Roman" pitchFamily="34" charset="-122"/>
-                <a:cs typeface="Times New Roman" pitchFamily="34" charset="-120"/>
-              </a:rPr>
-              <a:t>Crust, mantle and core.</a:t>
-            </a:r>
-            <a:endParaRPr lang="en-US" sz="4000" dirty="0"/>
+              <a:t>Illustration: the internal structure of the Earth</a:t>
+            </a:r>
+            <a:endParaRPr lang="en-US" sz="1600" dirty="0"/>
           </a:p>
         </p:txBody>
       </p:sp>
@@ -14821,7 +15175,7 @@
                 <a:ea typeface="Times New Roman" pitchFamily="34" charset="-122"/>
                 <a:cs typeface="Times New Roman" pitchFamily="34" charset="-120"/>
               </a:rPr>
-              <a:t>Evaluation 2</a:t>
+              <a:t>Evaluation 1</a:t>
             </a:r>
             <a:endParaRPr lang="en-US" sz="3600" dirty="0"/>
           </a:p>
@@ -14863,7 +15217,7 @@
                 <a:ea typeface="Times New Roman" pitchFamily="34" charset="-122"/>
                 <a:cs typeface="Times New Roman" pitchFamily="34" charset="-120"/>
               </a:rPr>
-              <a:t>Which layer do we live on?</a:t>
+              <a:t>Name the three main layers of the Earth.</a:t>
             </a:r>
             <a:endParaRPr lang="en-US" sz="4000" dirty="0"/>
           </a:p>
@@ -15082,7 +15436,7 @@
                 <a:ea typeface="Times New Roman" pitchFamily="34" charset="-122"/>
                 <a:cs typeface="Times New Roman" pitchFamily="34" charset="-120"/>
               </a:rPr>
-              <a:t>The crust.</a:t>
+              <a:t>Crust, mantle and core.</a:t>
             </a:r>
             <a:endParaRPr lang="en-US" sz="4000" dirty="0"/>
           </a:p>
@@ -15194,7 +15548,7 @@
                 <a:ea typeface="Calibri" pitchFamily="34" charset="-122"/>
                 <a:cs typeface="Calibri" pitchFamily="34" charset="-120"/>
               </a:rPr>
-              <a:t>REMEDIATION</a:t>
+              <a:t>FORMATIVE EVALUATION</a:t>
             </a:r>
             <a:endParaRPr lang="en-US" sz="1400" dirty="0"/>
           </a:p>
@@ -15217,7 +15571,7 @@
         <p:spPr>
           <a:xfrm>
             <a:off x="0" y="658368"/>
-            <a:ext cx="2468880" cy="5833872"/>
+            <a:ext cx="5120640" cy="5833872"/>
           </a:xfrm>
           <a:prstGeom prst="rect">
             <a:avLst/>
@@ -15232,8 +15586,8 @@
         </p:nvSpPr>
         <p:spPr>
           <a:xfrm>
-            <a:off x="2697480" y="1005840"/>
-            <a:ext cx="9174175" cy="731520"/>
+            <a:off x="5349240" y="1005840"/>
+            <a:ext cx="6522415" cy="731520"/>
           </a:xfrm>
           <a:prstGeom prst="rect">
             <a:avLst/>
@@ -15259,7 +15613,7 @@
                 <a:ea typeface="Times New Roman" pitchFamily="34" charset="-122"/>
                 <a:cs typeface="Times New Roman" pitchFamily="34" charset="-120"/>
               </a:rPr>
-              <a:t>Remediation</a:t>
+              <a:t>Evaluation 2</a:t>
             </a:r>
             <a:endParaRPr lang="en-US" sz="3600" dirty="0"/>
           </a:p>
@@ -15273,8 +15627,8 @@
         </p:nvSpPr>
         <p:spPr>
           <a:xfrm>
-            <a:off x="2697480" y="1783080"/>
-            <a:ext cx="9174175" cy="4663440"/>
+            <a:off x="5349240" y="1783080"/>
+            <a:ext cx="6522415" cy="4663440"/>
           </a:xfrm>
           <a:prstGeom prst="rect">
             <a:avLst/>
@@ -15293,7 +15647,7 @@
               <a:buNone/>
             </a:pPr>
             <a:r>
-              <a:rPr lang="en-US" sz="4000" b="1" dirty="0">
+              <a:rPr lang="en-US" sz="4000" dirty="0">
                 <a:solidFill>
                   <a:srgbClr val="111111"/>
                 </a:solidFill>
@@ -15301,73 +15655,7 @@
                 <a:ea typeface="Times New Roman" pitchFamily="34" charset="-122"/>
                 <a:cs typeface="Times New Roman" pitchFamily="34" charset="-120"/>
               </a:rPr>
-              <a:t>Fill in the blanks:</a:t>
-            </a:r>
-            <a:endParaRPr lang="en-US" sz="4000" dirty="0"/>
-          </a:p>
-          <a:p>
-            <a:pPr algn="l" marL="342900" indent="-342900">
-              <a:spcAft>
-                <a:spcPts val="800"/>
-              </a:spcAft>
-              <a:buSzPct val="100000"/>
-              <a:buFont typeface="+mj-lt"/>
-              <a:buAutoNum type="arabicPeriod" startAt="1"/>
-            </a:pPr>
-            <a:r>
-              <a:rPr lang="en-US" sz="4000" dirty="0">
-                <a:solidFill>
-                  <a:srgbClr val="111111"/>
-                </a:solidFill>
-                <a:latin typeface="Times New Roman" pitchFamily="34" charset="0"/>
-                <a:ea typeface="Times New Roman" pitchFamily="34" charset="-122"/>
-                <a:cs typeface="Times New Roman" pitchFamily="34" charset="-120"/>
-              </a:rPr>
-              <a:t>The outer layer of the Earth is the ______.</a:t>
-            </a:r>
-            <a:endParaRPr lang="en-US" sz="4000" dirty="0"/>
-          </a:p>
-          <a:p>
-            <a:pPr algn="l" marL="342900" indent="-342900">
-              <a:spcAft>
-                <a:spcPts val="800"/>
-              </a:spcAft>
-              <a:buSzPct val="100000"/>
-              <a:buFont typeface="+mj-lt"/>
-              <a:buAutoNum type="arabicPeriod" startAt="1"/>
-            </a:pPr>
-            <a:r>
-              <a:rPr lang="en-US" sz="4000" dirty="0">
-                <a:solidFill>
-                  <a:srgbClr val="111111"/>
-                </a:solidFill>
-                <a:latin typeface="Times New Roman" pitchFamily="34" charset="0"/>
-                <a:ea typeface="Times New Roman" pitchFamily="34" charset="-122"/>
-                <a:cs typeface="Times New Roman" pitchFamily="34" charset="-120"/>
-              </a:rPr>
-              <a:t>The layer under the crust is the ______.</a:t>
-            </a:r>
-            <a:endParaRPr lang="en-US" sz="4000" dirty="0"/>
-          </a:p>
-          <a:p>
-            <a:pPr algn="l" marL="342900" indent="-342900">
-              <a:spcAft>
-                <a:spcPts val="800"/>
-              </a:spcAft>
-              <a:buSzPct val="100000"/>
-              <a:buFont typeface="+mj-lt"/>
-              <a:buAutoNum type="arabicPeriod" startAt="1"/>
-            </a:pPr>
-            <a:r>
-              <a:rPr lang="en-US" sz="4000" dirty="0">
-                <a:solidFill>
-                  <a:srgbClr val="111111"/>
-                </a:solidFill>
-                <a:latin typeface="Times New Roman" pitchFamily="34" charset="0"/>
-                <a:ea typeface="Times New Roman" pitchFamily="34" charset="-122"/>
-                <a:cs typeface="Times New Roman" pitchFamily="34" charset="-120"/>
-              </a:rPr>
-              <a:t>The centre of the Earth is the ______.</a:t>
+              <a:t>Which layer do we live on?</a:t>
             </a:r>
             <a:endParaRPr lang="en-US" sz="4000" dirty="0"/>
           </a:p>
@@ -15479,7 +15767,7 @@
                 <a:ea typeface="Calibri" pitchFamily="34" charset="-122"/>
                 <a:cs typeface="Calibri" pitchFamily="34" charset="-120"/>
               </a:rPr>
-              <a:t>HOMEWORK</a:t>
+              <a:t>FORMATIVE EVALUATION</a:t>
             </a:r>
             <a:endParaRPr lang="en-US" sz="1400" dirty="0"/>
           </a:p>
@@ -15544,7 +15832,7 @@
                 <a:ea typeface="Times New Roman" pitchFamily="34" charset="-122"/>
                 <a:cs typeface="Times New Roman" pitchFamily="34" charset="-120"/>
               </a:rPr>
-              <a:t>Homework</a:t>
+              <a:t>Expected Answer</a:t>
             </a:r>
             <a:endParaRPr lang="en-US" sz="3600" dirty="0"/>
           </a:p>
@@ -15586,7 +15874,7 @@
                 <a:ea typeface="Times New Roman" pitchFamily="34" charset="-122"/>
                 <a:cs typeface="Times New Roman" pitchFamily="34" charset="-120"/>
               </a:rPr>
-              <a:t>Draw and label the internal structure of the Earth.</a:t>
+              <a:t>The crust.</a:t>
             </a:r>
             <a:endParaRPr lang="en-US" sz="4000" dirty="0"/>
           </a:p>
@@ -15698,7 +15986,7 @@
                 <a:ea typeface="Calibri" pitchFamily="34" charset="-122"/>
                 <a:cs typeface="Calibri" pitchFamily="34" charset="-120"/>
               </a:rPr>
-              <a:t>NEXT LESSON</a:t>
+              <a:t>REMEDIATION</a:t>
             </a:r>
             <a:endParaRPr lang="en-US" sz="1400" dirty="0"/>
           </a:p>
@@ -15721,7 +16009,7 @@
         <p:spPr>
           <a:xfrm>
             <a:off x="0" y="658368"/>
-            <a:ext cx="5120640" cy="5833872"/>
+            <a:ext cx="2468880" cy="5833872"/>
           </a:xfrm>
           <a:prstGeom prst="rect">
             <a:avLst/>
@@ -15736,8 +16024,8 @@
         </p:nvSpPr>
         <p:spPr>
           <a:xfrm>
-            <a:off x="5349240" y="1005840"/>
-            <a:ext cx="6522415" cy="731520"/>
+            <a:off x="2697480" y="1005840"/>
+            <a:ext cx="9174175" cy="731520"/>
           </a:xfrm>
           <a:prstGeom prst="rect">
             <a:avLst/>
@@ -15763,7 +16051,7 @@
                 <a:ea typeface="Times New Roman" pitchFamily="34" charset="-122"/>
                 <a:cs typeface="Times New Roman" pitchFamily="34" charset="-120"/>
               </a:rPr>
-              <a:t>Next Lesson</a:t>
+              <a:t>Remediation</a:t>
             </a:r>
             <a:endParaRPr lang="en-US" sz="3600" dirty="0"/>
           </a:p>
@@ -15777,8 +16065,8 @@
         </p:nvSpPr>
         <p:spPr>
           <a:xfrm>
-            <a:off x="5349240" y="1783080"/>
-            <a:ext cx="6522415" cy="4663440"/>
+            <a:off x="2697480" y="1783080"/>
+            <a:ext cx="9174175" cy="4663440"/>
           </a:xfrm>
           <a:prstGeom prst="rect">
             <a:avLst/>
@@ -15787,10 +16075,10 @@
           <a:ln/>
         </p:spPr>
         <p:txBody>
-          <a:bodyPr wrap="square" lIns="0" tIns="0" rIns="0" bIns="0" rtlCol="0" anchor="ctr"/>
-          <a:lstStyle/>
-          <a:p>
-            <a:pPr algn="ctr" indent="0" marL="0">
+          <a:bodyPr wrap="square" lIns="0" tIns="0" rIns="0" bIns="0" rtlCol="0" anchor="t"/>
+          <a:lstStyle/>
+          <a:p>
+            <a:pPr algn="l" indent="0" marL="0">
               <a:spcAft>
                 <a:spcPts val="800"/>
               </a:spcAft>
@@ -15805,27 +16093,73 @@
                 <a:ea typeface="Times New Roman" pitchFamily="34" charset="-122"/>
                 <a:cs typeface="Times New Roman" pitchFamily="34" charset="-120"/>
               </a:rPr>
-              <a:t>Our next lesson will be on:</a:t>
+              <a:t>Fill in the blanks:</a:t>
             </a:r>
             <a:endParaRPr lang="en-US" sz="4000" dirty="0"/>
           </a:p>
           <a:p>
-            <a:pPr algn="ctr" indent="0" marL="0">
+            <a:pPr algn="l" marL="342900" indent="-342900">
               <a:spcAft>
                 <a:spcPts val="800"/>
               </a:spcAft>
-              <a:buNone/>
+              <a:buSzPct val="100000"/>
+              <a:buFont typeface="+mj-lt"/>
+              <a:buAutoNum type="arabicPeriod" startAt="1"/>
             </a:pPr>
             <a:r>
-              <a:rPr lang="en-US" sz="4000" b="1" dirty="0">
-                <a:solidFill>
-                  <a:srgbClr val="990011"/>
+              <a:rPr lang="en-US" sz="4000" dirty="0">
+                <a:solidFill>
+                  <a:srgbClr val="111111"/>
                 </a:solidFill>
                 <a:latin typeface="Times New Roman" pitchFamily="34" charset="0"/>
                 <a:ea typeface="Times New Roman" pitchFamily="34" charset="-122"/>
                 <a:cs typeface="Times New Roman" pitchFamily="34" charset="-120"/>
               </a:rPr>
-              <a:t>Lesson 12: Plate Movements</a:t>
+              <a:t>The outer layer of the Earth is the ______.</a:t>
+            </a:r>
+            <a:endParaRPr lang="en-US" sz="4000" dirty="0"/>
+          </a:p>
+          <a:p>
+            <a:pPr algn="l" marL="342900" indent="-342900">
+              <a:spcAft>
+                <a:spcPts val="800"/>
+              </a:spcAft>
+              <a:buSzPct val="100000"/>
+              <a:buFont typeface="+mj-lt"/>
+              <a:buAutoNum type="arabicPeriod" startAt="1"/>
+            </a:pPr>
+            <a:r>
+              <a:rPr lang="en-US" sz="4000" dirty="0">
+                <a:solidFill>
+                  <a:srgbClr val="111111"/>
+                </a:solidFill>
+                <a:latin typeface="Times New Roman" pitchFamily="34" charset="0"/>
+                <a:ea typeface="Times New Roman" pitchFamily="34" charset="-122"/>
+                <a:cs typeface="Times New Roman" pitchFamily="34" charset="-120"/>
+              </a:rPr>
+              <a:t>The layer under the crust is the ______.</a:t>
+            </a:r>
+            <a:endParaRPr lang="en-US" sz="4000" dirty="0"/>
+          </a:p>
+          <a:p>
+            <a:pPr algn="l" marL="342900" indent="-342900">
+              <a:spcAft>
+                <a:spcPts val="800"/>
+              </a:spcAft>
+              <a:buSzPct val="100000"/>
+              <a:buFont typeface="+mj-lt"/>
+              <a:buAutoNum type="arabicPeriod" startAt="1"/>
+            </a:pPr>
+            <a:r>
+              <a:rPr lang="en-US" sz="4000" dirty="0">
+                <a:solidFill>
+                  <a:srgbClr val="111111"/>
+                </a:solidFill>
+                <a:latin typeface="Times New Roman" pitchFamily="34" charset="0"/>
+                <a:ea typeface="Times New Roman" pitchFamily="34" charset="-122"/>
+                <a:cs typeface="Times New Roman" pitchFamily="34" charset="-120"/>
+              </a:rPr>
+              <a:t>The centre of the Earth is the ______.</a:t>
             </a:r>
             <a:endParaRPr lang="en-US" sz="4000" dirty="0"/>
           </a:p>
@@ -15937,6 +16271,464 @@
                 <a:ea typeface="Calibri" pitchFamily="34" charset="-122"/>
                 <a:cs typeface="Calibri" pitchFamily="34" charset="-120"/>
               </a:rPr>
+              <a:t>HOMEWORK</a:t>
+            </a:r>
+            <a:endParaRPr lang="en-US" sz="1400" dirty="0"/>
+          </a:p>
+        </p:txBody>
+      </p:sp>
+      <p:pic>
+        <p:nvPicPr>
+          <p:cNvPr id="3" name="Image 0" descr="/home/claude/f4/img/minesec_sheet.png">    </p:cNvPr>
+          <p:cNvPicPr>
+            <a:picLocks noChangeAspect="1"/>
+          </p:cNvPicPr>
+          <p:nvPr/>
+        </p:nvPicPr>
+        <p:blipFill>
+          <a:blip r:embed="rId1"/>
+          <a:stretch>
+            <a:fillRect/>
+          </a:stretch>
+        </p:blipFill>
+        <p:spPr>
+          <a:xfrm>
+            <a:off x="0" y="658368"/>
+            <a:ext cx="5120640" cy="5833872"/>
+          </a:xfrm>
+          <a:prstGeom prst="rect">
+            <a:avLst/>
+          </a:prstGeom>
+        </p:spPr>
+      </p:pic>
+      <p:sp>
+        <p:nvSpPr>
+          <p:cNvPr id="4" name="Text 1"/>
+          <p:cNvSpPr/>
+          <p:nvPr/>
+        </p:nvSpPr>
+        <p:spPr>
+          <a:xfrm>
+            <a:off x="5349240" y="1005840"/>
+            <a:ext cx="6522415" cy="731520"/>
+          </a:xfrm>
+          <a:prstGeom prst="rect">
+            <a:avLst/>
+          </a:prstGeom>
+          <a:noFill/>
+          <a:ln/>
+        </p:spPr>
+        <p:txBody>
+          <a:bodyPr wrap="square" lIns="0" tIns="0" rIns="0" bIns="0" rtlCol="0" anchor="ctr">
+            <a:normAutofit/>
+          </a:bodyPr>
+          <a:lstStyle/>
+          <a:p>
+            <a:pPr algn="ctr" indent="0" marL="0">
+              <a:buNone/>
+            </a:pPr>
+            <a:r>
+              <a:rPr lang="en-US" sz="3600" b="1" dirty="0">
+                <a:solidFill>
+                  <a:srgbClr val="990011"/>
+                </a:solidFill>
+                <a:latin typeface="Times New Roman" pitchFamily="34" charset="0"/>
+                <a:ea typeface="Times New Roman" pitchFamily="34" charset="-122"/>
+                <a:cs typeface="Times New Roman" pitchFamily="34" charset="-120"/>
+              </a:rPr>
+              <a:t>Homework</a:t>
+            </a:r>
+            <a:endParaRPr lang="en-US" sz="3600" dirty="0"/>
+          </a:p>
+        </p:txBody>
+      </p:sp>
+      <p:sp>
+        <p:nvSpPr>
+          <p:cNvPr id="5" name="Text 2"/>
+          <p:cNvSpPr/>
+          <p:nvPr/>
+        </p:nvSpPr>
+        <p:spPr>
+          <a:xfrm>
+            <a:off x="5349240" y="1783080"/>
+            <a:ext cx="6522415" cy="4663440"/>
+          </a:xfrm>
+          <a:prstGeom prst="rect">
+            <a:avLst/>
+          </a:prstGeom>
+          <a:noFill/>
+          <a:ln/>
+        </p:spPr>
+        <p:txBody>
+          <a:bodyPr wrap="square" lIns="0" tIns="0" rIns="0" bIns="0" rtlCol="0" anchor="t"/>
+          <a:lstStyle/>
+          <a:p>
+            <a:pPr algn="l" indent="0" marL="0">
+              <a:spcAft>
+                <a:spcPts val="800"/>
+              </a:spcAft>
+              <a:buNone/>
+            </a:pPr>
+            <a:r>
+              <a:rPr lang="en-US" sz="4000" dirty="0">
+                <a:solidFill>
+                  <a:srgbClr val="111111"/>
+                </a:solidFill>
+                <a:latin typeface="Times New Roman" pitchFamily="34" charset="0"/>
+                <a:ea typeface="Times New Roman" pitchFamily="34" charset="-122"/>
+                <a:cs typeface="Times New Roman" pitchFamily="34" charset="-120"/>
+              </a:rPr>
+              <a:t>Draw and label the internal structure of the Earth.</a:t>
+            </a:r>
+            <a:endParaRPr lang="en-US" sz="4000" dirty="0"/>
+          </a:p>
+        </p:txBody>
+      </p:sp>
+      <p:sp>
+        <p:nvSpPr>
+          <p:cNvPr id="25" name="Slide Number Placeholder 0"/>
+          <p:cNvSpPr>
+            <a:spLocks noGrp="1"/>
+          </p:cNvSpPr>
+          <p:nvPr>
+            <p:ph type="sldNum" sz="quarter" idx="4294967295"/>
+          </p:nvPr>
+        </p:nvSpPr>
+        <p:spPr>
+          <a:xfrm>
+            <a:off x="27432" y="91440"/>
+            <a:ext cx="585216" cy="475488"/>
+          </a:xfrm>
+          <a:prstGeom prst="rect">
+            <a:avLst/>
+          </a:prstGeom>
+          <a:extLst>
+            <a:ext uri="{C572A759-6A51-4108-AA02-DFA0A04FC94B}">
+              <ma14:wrappingTextBoxFlag xmlns:ma14="http://schemas.microsoft.com/office/mac/drawingml/2011/main" val="0"/>
+            </a:ext>
+          </a:extLst>
+        </p:spPr>
+        <p:txBody>
+          <a:bodyPr/>
+          <a:lstStyle>
+            <a:lvl1pPr>
+              <a:defRPr sz="2000">
+                <a:solidFill>
+                  <a:srgbClr val="FFFFFF"/>
+                </a:solidFill>
+                <a:latin typeface="Calibri"/>
+                <a:ea typeface="Calibri"/>
+                <a:cs typeface="Calibri"/>
+              </a:defRPr>
+            </a:lvl1pPr>
+          </a:lstStyle>
+          <a:p>
+            <a:pPr algn="ctr"/>
+            <a:fld id="{F7021451-1387-4CA6-816F-3879F97B5CBC}" type="slidenum">
+              <a:rPr b="1" lang="en-US"/>
+              <a:t>45</a:t>
+            </a:fld>
+            <a:endParaRPr lang="en-US"/>
+          </a:p>
+        </p:txBody>
+      </p:sp>
+    </p:spTree>
+  </p:cSld>
+  <p:clrMapOvr>
+    <a:masterClrMapping/>
+  </p:clrMapOvr>
+</p:sld>
+</file>
+
+<file path=ppt/slides/slide46.xml><?xml version="1.0" encoding="utf-8"?>
+<p:sld xmlns:a="http://schemas.openxmlformats.org/drawingml/2006/main" xmlns:r="http://schemas.openxmlformats.org/officeDocument/2006/relationships" xmlns:p="http://schemas.openxmlformats.org/presentationml/2006/main">
+  <p:cSld name="Slide 46">
+    <p:spTree>
+      <p:nvGrpSpPr>
+        <p:cNvPr id="1" name=""/>
+        <p:cNvGrpSpPr/>
+        <p:nvPr/>
+      </p:nvGrpSpPr>
+      <p:grpSpPr>
+        <a:xfrm>
+          <a:off x="0" y="0"/>
+          <a:ext cx="0" cy="0"/>
+          <a:chOff x="0" y="0"/>
+          <a:chExt cx="0" cy="0"/>
+        </a:xfrm>
+      </p:grpSpPr>
+      <p:sp>
+        <p:nvSpPr>
+          <p:cNvPr id="2" name="Text 0"/>
+          <p:cNvSpPr/>
+          <p:nvPr/>
+        </p:nvSpPr>
+        <p:spPr>
+          <a:xfrm>
+            <a:off x="457200" y="713232"/>
+            <a:ext cx="11368735" cy="274320"/>
+          </a:xfrm>
+          <a:prstGeom prst="rect">
+            <a:avLst/>
+          </a:prstGeom>
+          <a:noFill/>
+          <a:ln/>
+        </p:spPr>
+        <p:txBody>
+          <a:bodyPr wrap="square" lIns="0" tIns="0" rIns="0" bIns="0" rtlCol="0" anchor="ctr"/>
+          <a:lstStyle/>
+          <a:p>
+            <a:pPr algn="r" indent="0" marL="0">
+              <a:buNone/>
+            </a:pPr>
+            <a:r>
+              <a:rPr lang="en-US" sz="1400" b="1" dirty="0">
+                <a:solidFill>
+                  <a:srgbClr val="1C3F6E"/>
+                </a:solidFill>
+                <a:latin typeface="Calibri" pitchFamily="34" charset="0"/>
+                <a:ea typeface="Calibri" pitchFamily="34" charset="-122"/>
+                <a:cs typeface="Calibri" pitchFamily="34" charset="-120"/>
+              </a:rPr>
+              <a:t>NEXT LESSON</a:t>
+            </a:r>
+            <a:endParaRPr lang="en-US" sz="1400" dirty="0"/>
+          </a:p>
+        </p:txBody>
+      </p:sp>
+      <p:pic>
+        <p:nvPicPr>
+          <p:cNvPr id="3" name="Image 0" descr="/home/claude/f4/img/minesec_sheet.png">    </p:cNvPr>
+          <p:cNvPicPr>
+            <a:picLocks noChangeAspect="1"/>
+          </p:cNvPicPr>
+          <p:nvPr/>
+        </p:nvPicPr>
+        <p:blipFill>
+          <a:blip r:embed="rId1"/>
+          <a:stretch>
+            <a:fillRect/>
+          </a:stretch>
+        </p:blipFill>
+        <p:spPr>
+          <a:xfrm>
+            <a:off x="0" y="658368"/>
+            <a:ext cx="5120640" cy="5833872"/>
+          </a:xfrm>
+          <a:prstGeom prst="rect">
+            <a:avLst/>
+          </a:prstGeom>
+        </p:spPr>
+      </p:pic>
+      <p:sp>
+        <p:nvSpPr>
+          <p:cNvPr id="4" name="Text 1"/>
+          <p:cNvSpPr/>
+          <p:nvPr/>
+        </p:nvSpPr>
+        <p:spPr>
+          <a:xfrm>
+            <a:off x="5349240" y="1005840"/>
+            <a:ext cx="6522415" cy="731520"/>
+          </a:xfrm>
+          <a:prstGeom prst="rect">
+            <a:avLst/>
+          </a:prstGeom>
+          <a:noFill/>
+          <a:ln/>
+        </p:spPr>
+        <p:txBody>
+          <a:bodyPr wrap="square" lIns="0" tIns="0" rIns="0" bIns="0" rtlCol="0" anchor="ctr">
+            <a:normAutofit/>
+          </a:bodyPr>
+          <a:lstStyle/>
+          <a:p>
+            <a:pPr algn="ctr" indent="0" marL="0">
+              <a:buNone/>
+            </a:pPr>
+            <a:r>
+              <a:rPr lang="en-US" sz="3600" b="1" dirty="0">
+                <a:solidFill>
+                  <a:srgbClr val="990011"/>
+                </a:solidFill>
+                <a:latin typeface="Times New Roman" pitchFamily="34" charset="0"/>
+                <a:ea typeface="Times New Roman" pitchFamily="34" charset="-122"/>
+                <a:cs typeface="Times New Roman" pitchFamily="34" charset="-120"/>
+              </a:rPr>
+              <a:t>Next Lesson</a:t>
+            </a:r>
+            <a:endParaRPr lang="en-US" sz="3600" dirty="0"/>
+          </a:p>
+        </p:txBody>
+      </p:sp>
+      <p:sp>
+        <p:nvSpPr>
+          <p:cNvPr id="5" name="Text 2"/>
+          <p:cNvSpPr/>
+          <p:nvPr/>
+        </p:nvSpPr>
+        <p:spPr>
+          <a:xfrm>
+            <a:off x="5349240" y="1783080"/>
+            <a:ext cx="6522415" cy="4663440"/>
+          </a:xfrm>
+          <a:prstGeom prst="rect">
+            <a:avLst/>
+          </a:prstGeom>
+          <a:noFill/>
+          <a:ln/>
+        </p:spPr>
+        <p:txBody>
+          <a:bodyPr wrap="square" lIns="0" tIns="0" rIns="0" bIns="0" rtlCol="0" anchor="ctr"/>
+          <a:lstStyle/>
+          <a:p>
+            <a:pPr algn="ctr" indent="0" marL="0">
+              <a:spcAft>
+                <a:spcPts val="800"/>
+              </a:spcAft>
+              <a:buNone/>
+            </a:pPr>
+            <a:r>
+              <a:rPr lang="en-US" sz="4000" b="1" dirty="0">
+                <a:solidFill>
+                  <a:srgbClr val="111111"/>
+                </a:solidFill>
+                <a:latin typeface="Times New Roman" pitchFamily="34" charset="0"/>
+                <a:ea typeface="Times New Roman" pitchFamily="34" charset="-122"/>
+                <a:cs typeface="Times New Roman" pitchFamily="34" charset="-120"/>
+              </a:rPr>
+              <a:t>Our next lesson will be on:</a:t>
+            </a:r>
+            <a:endParaRPr lang="en-US" sz="4000" dirty="0"/>
+          </a:p>
+          <a:p>
+            <a:pPr algn="ctr" indent="0" marL="0">
+              <a:spcAft>
+                <a:spcPts val="800"/>
+              </a:spcAft>
+              <a:buNone/>
+            </a:pPr>
+            <a:r>
+              <a:rPr lang="en-US" sz="4000" b="1" dirty="0">
+                <a:solidFill>
+                  <a:srgbClr val="990011"/>
+                </a:solidFill>
+                <a:latin typeface="Times New Roman" pitchFamily="34" charset="0"/>
+                <a:ea typeface="Times New Roman" pitchFamily="34" charset="-122"/>
+                <a:cs typeface="Times New Roman" pitchFamily="34" charset="-120"/>
+              </a:rPr>
+              <a:t>Lesson 12: Plate Movements</a:t>
+            </a:r>
+            <a:endParaRPr lang="en-US" sz="4000" dirty="0"/>
+          </a:p>
+        </p:txBody>
+      </p:sp>
+      <p:sp>
+        <p:nvSpPr>
+          <p:cNvPr id="25" name="Slide Number Placeholder 0"/>
+          <p:cNvSpPr>
+            <a:spLocks noGrp="1"/>
+          </p:cNvSpPr>
+          <p:nvPr>
+            <p:ph type="sldNum" sz="quarter" idx="4294967295"/>
+          </p:nvPr>
+        </p:nvSpPr>
+        <p:spPr>
+          <a:xfrm>
+            <a:off x="27432" y="91440"/>
+            <a:ext cx="585216" cy="475488"/>
+          </a:xfrm>
+          <a:prstGeom prst="rect">
+            <a:avLst/>
+          </a:prstGeom>
+          <a:extLst>
+            <a:ext uri="{C572A759-6A51-4108-AA02-DFA0A04FC94B}">
+              <ma14:wrappingTextBoxFlag xmlns:ma14="http://schemas.microsoft.com/office/mac/drawingml/2011/main" val="0"/>
+            </a:ext>
+          </a:extLst>
+        </p:spPr>
+        <p:txBody>
+          <a:bodyPr/>
+          <a:lstStyle>
+            <a:lvl1pPr>
+              <a:defRPr sz="2000">
+                <a:solidFill>
+                  <a:srgbClr val="FFFFFF"/>
+                </a:solidFill>
+                <a:latin typeface="Calibri"/>
+                <a:ea typeface="Calibri"/>
+                <a:cs typeface="Calibri"/>
+              </a:defRPr>
+            </a:lvl1pPr>
+          </a:lstStyle>
+          <a:p>
+            <a:pPr algn="ctr"/>
+            <a:fld id="{F7021451-1387-4CA6-816F-3879F97B5CBC}" type="slidenum">
+              <a:rPr b="1" lang="en-US"/>
+              <a:t>46</a:t>
+            </a:fld>
+            <a:endParaRPr lang="en-US"/>
+          </a:p>
+        </p:txBody>
+      </p:sp>
+    </p:spTree>
+  </p:cSld>
+  <p:clrMapOvr>
+    <a:masterClrMapping/>
+  </p:clrMapOvr>
+</p:sld>
+</file>
+
+<file path=ppt/slides/slide47.xml><?xml version="1.0" encoding="utf-8"?>
+<p:sld xmlns:a="http://schemas.openxmlformats.org/drawingml/2006/main" xmlns:r="http://schemas.openxmlformats.org/officeDocument/2006/relationships" xmlns:p="http://schemas.openxmlformats.org/presentationml/2006/main">
+  <p:cSld name="Slide 47">
+    <p:spTree>
+      <p:nvGrpSpPr>
+        <p:cNvPr id="1" name=""/>
+        <p:cNvGrpSpPr/>
+        <p:nvPr/>
+      </p:nvGrpSpPr>
+      <p:grpSpPr>
+        <a:xfrm>
+          <a:off x="0" y="0"/>
+          <a:ext cx="0" cy="0"/>
+          <a:chOff x="0" y="0"/>
+          <a:chExt cx="0" cy="0"/>
+        </a:xfrm>
+      </p:grpSpPr>
+      <p:sp>
+        <p:nvSpPr>
+          <p:cNvPr id="2" name="Text 0"/>
+          <p:cNvSpPr/>
+          <p:nvPr/>
+        </p:nvSpPr>
+        <p:spPr>
+          <a:xfrm>
+            <a:off x="457200" y="713232"/>
+            <a:ext cx="11368735" cy="274320"/>
+          </a:xfrm>
+          <a:prstGeom prst="rect">
+            <a:avLst/>
+          </a:prstGeom>
+          <a:noFill/>
+          <a:ln/>
+        </p:spPr>
+        <p:txBody>
+          <a:bodyPr wrap="square" lIns="0" tIns="0" rIns="0" bIns="0" rtlCol="0" anchor="ctr"/>
+          <a:lstStyle/>
+          <a:p>
+            <a:pPr algn="r" indent="0" marL="0">
+              <a:buNone/>
+            </a:pPr>
+            <a:r>
+              <a:rPr lang="en-US" sz="1400" b="1" dirty="0">
+                <a:solidFill>
+                  <a:srgbClr val="1C3F6E"/>
+                </a:solidFill>
+                <a:latin typeface="Calibri" pitchFamily="34" charset="0"/>
+                <a:ea typeface="Calibri" pitchFamily="34" charset="-122"/>
+                <a:cs typeface="Calibri" pitchFamily="34" charset="-120"/>
+              </a:rPr>
               <a:t>BILINGUAL GAME</a:t>
             </a:r>
             <a:endParaRPr lang="en-US" sz="1400" dirty="0"/>
@@ -15984,7 +16776,7 @@
       </p:sp>
       <p:graphicFrame>
         <p:nvGraphicFramePr>
-          <p:cNvPr id="46" name="Table 0"/>
+          <p:cNvPr id="48" name="Table 0"/>
           <p:cNvGraphicFramePr>
             <a:graphicFrameLocks noGrp="1"/>
           </p:cNvGraphicFramePr>
@@ -17020,7 +17812,7 @@
             <a:pPr algn="ctr"/>
             <a:fld id="{F7021451-1387-4CA6-816F-3879F97B5CBC}" type="slidenum">
               <a:rPr b="1" lang="en-US"/>
-              <a:t>45</a:t>
+              <a:t>47</a:t>
             </a:fld>
             <a:endParaRPr lang="en-US"/>
           </a:p>
@@ -17034,9 +17826,9 @@
 </p:sld>
 </file>
 
-<file path=ppt/slides/slide46.xml><?xml version="1.0" encoding="utf-8"?>
+<file path=ppt/slides/slide48.xml><?xml version="1.0" encoding="utf-8"?>
 <p:sld xmlns:a="http://schemas.openxmlformats.org/drawingml/2006/main" xmlns:r="http://schemas.openxmlformats.org/officeDocument/2006/relationships" xmlns:p="http://schemas.openxmlformats.org/presentationml/2006/main">
-  <p:cSld name="Slide 46">
+  <p:cSld name="Slide 48">
     <p:spTree>
       <p:nvGrpSpPr>
         <p:cNvPr id="1" name=""/>
@@ -17131,7 +17923,7 @@
       </p:sp>
       <p:graphicFrame>
         <p:nvGraphicFramePr>
-          <p:cNvPr id="47" name="Table 0"/>
+          <p:cNvPr id="49" name="Table 0"/>
           <p:cNvGraphicFramePr>
             <a:graphicFrameLocks noGrp="1"/>
           </p:cNvGraphicFramePr>
@@ -17753,7 +18545,7 @@
             <a:pPr algn="ctr"/>
             <a:fld id="{F7021451-1387-4CA6-816F-3879F97B5CBC}" type="slidenum">
               <a:rPr b="1" lang="en-US"/>
-              <a:t>46</a:t>
+              <a:t>48</a:t>
             </a:fld>
             <a:endParaRPr lang="en-US"/>
           </a:p>
@@ -17767,9 +18559,9 @@
 </p:sld>
 </file>
 
-<file path=ppt/slides/slide47.xml><?xml version="1.0" encoding="utf-8"?>
+<file path=ppt/slides/slide49.xml><?xml version="1.0" encoding="utf-8"?>
 <p:sld xmlns:a="http://schemas.openxmlformats.org/drawingml/2006/main" xmlns:r="http://schemas.openxmlformats.org/officeDocument/2006/relationships" xmlns:p="http://schemas.openxmlformats.org/presentationml/2006/main">
-  <p:cSld name="Slide 47">
+  <p:cSld name="Slide 49">
     <p:spTree>
       <p:nvGrpSpPr>
         <p:cNvPr id="1" name=""/>
@@ -17864,7 +18656,7 @@
       </p:sp>
       <p:graphicFrame>
         <p:nvGraphicFramePr>
-          <p:cNvPr id="48" name="Table 0"/>
+          <p:cNvPr id="50" name="Table 0"/>
           <p:cNvGraphicFramePr>
             <a:graphicFrameLocks noGrp="1"/>
           </p:cNvGraphicFramePr>
@@ -17974,7 +18766,7 @@
                           <a:ea typeface="Calibri" pitchFamily="34" charset="-122"/>
                           <a:cs typeface="Calibri" pitchFamily="34" charset="-120"/>
                         </a:rPr>
-                        <a:t>DEFINITIONS; The Main Layers of the Earth.</a:t>
+                        <a:t>DEFINITIONS; The Crust; The Mantle; The Core.</a:t>
                       </a:r>
                       <a:endParaRPr lang="en-US" sz="1600" dirty="0">
                         <a:latin typeface="Calibri" charset="0"/>
@@ -18624,635 +19416,6 @@
             <a:pPr algn="ctr"/>
             <a:fld id="{F7021451-1387-4CA6-816F-3879F97B5CBC}" type="slidenum">
               <a:rPr b="1" lang="en-US"/>
-              <a:t>47</a:t>
-            </a:fld>
-            <a:endParaRPr lang="en-US"/>
-          </a:p>
-        </p:txBody>
-      </p:sp>
-    </p:spTree>
-  </p:cSld>
-  <p:clrMapOvr>
-    <a:masterClrMapping/>
-  </p:clrMapOvr>
-</p:sld>
-</file>
-
-<file path=ppt/slides/slide48.xml><?xml version="1.0" encoding="utf-8"?>
-<p:sld xmlns:a="http://schemas.openxmlformats.org/drawingml/2006/main" xmlns:r="http://schemas.openxmlformats.org/officeDocument/2006/relationships" xmlns:p="http://schemas.openxmlformats.org/presentationml/2006/main">
-  <p:cSld name="Slide 48">
-    <p:spTree>
-      <p:nvGrpSpPr>
-        <p:cNvPr id="1" name=""/>
-        <p:cNvGrpSpPr/>
-        <p:nvPr/>
-      </p:nvGrpSpPr>
-      <p:grpSpPr>
-        <a:xfrm>
-          <a:off x="0" y="0"/>
-          <a:ext cx="0" cy="0"/>
-          <a:chOff x="0" y="0"/>
-          <a:chExt cx="0" cy="0"/>
-        </a:xfrm>
-      </p:grpSpPr>
-      <p:sp>
-        <p:nvSpPr>
-          <p:cNvPr id="2" name="Text 0"/>
-          <p:cNvSpPr/>
-          <p:nvPr/>
-        </p:nvSpPr>
-        <p:spPr>
-          <a:xfrm>
-            <a:off x="457200" y="713232"/>
-            <a:ext cx="11368735" cy="274320"/>
-          </a:xfrm>
-          <a:prstGeom prst="rect">
-            <a:avLst/>
-          </a:prstGeom>
-          <a:noFill/>
-          <a:ln/>
-        </p:spPr>
-        <p:txBody>
-          <a:bodyPr wrap="square" lIns="0" tIns="0" rIns="0" bIns="0" rtlCol="0" anchor="ctr"/>
-          <a:lstStyle/>
-          <a:p>
-            <a:pPr algn="r" indent="0" marL="0">
-              <a:buNone/>
-            </a:pPr>
-            <a:r>
-              <a:rPr lang="en-US" sz="1400" b="1" dirty="0">
-                <a:solidFill>
-                  <a:srgbClr val="1C3F6E"/>
-                </a:solidFill>
-                <a:latin typeface="Calibri" pitchFamily="34" charset="0"/>
-                <a:ea typeface="Calibri" pitchFamily="34" charset="-122"/>
-                <a:cs typeface="Calibri" pitchFamily="34" charset="-120"/>
-              </a:rPr>
-              <a:t>TEACHER'S NOTE</a:t>
-            </a:r>
-            <a:endParaRPr lang="en-US" sz="1400" dirty="0"/>
-          </a:p>
-        </p:txBody>
-      </p:sp>
-      <p:pic>
-        <p:nvPicPr>
-          <p:cNvPr id="3" name="Image 0" descr="/home/claude/f4/img/minesec_sheet.png">    </p:cNvPr>
-          <p:cNvPicPr>
-            <a:picLocks noChangeAspect="1"/>
-          </p:cNvPicPr>
-          <p:nvPr/>
-        </p:nvPicPr>
-        <p:blipFill>
-          <a:blip r:embed="rId1"/>
-          <a:stretch>
-            <a:fillRect/>
-          </a:stretch>
-        </p:blipFill>
-        <p:spPr>
-          <a:xfrm>
-            <a:off x="0" y="658368"/>
-            <a:ext cx="2468880" cy="5833872"/>
-          </a:xfrm>
-          <a:prstGeom prst="rect">
-            <a:avLst/>
-          </a:prstGeom>
-        </p:spPr>
-      </p:pic>
-      <p:sp>
-        <p:nvSpPr>
-          <p:cNvPr id="4" name="Text 1"/>
-          <p:cNvSpPr/>
-          <p:nvPr/>
-        </p:nvSpPr>
-        <p:spPr>
-          <a:xfrm>
-            <a:off x="2697480" y="1005840"/>
-            <a:ext cx="9174175" cy="731520"/>
-          </a:xfrm>
-          <a:prstGeom prst="rect">
-            <a:avLst/>
-          </a:prstGeom>
-          <a:noFill/>
-          <a:ln/>
-        </p:spPr>
-        <p:txBody>
-          <a:bodyPr wrap="square" lIns="0" tIns="0" rIns="0" bIns="0" rtlCol="0" anchor="ctr">
-            <a:normAutofit/>
-          </a:bodyPr>
-          <a:lstStyle/>
-          <a:p>
-            <a:pPr algn="ctr" indent="0" marL="0">
-              <a:buNone/>
-            </a:pPr>
-            <a:r>
-              <a:rPr lang="en-US" sz="3600" b="1" dirty="0">
-                <a:solidFill>
-                  <a:srgbClr val="990011"/>
-                </a:solidFill>
-                <a:latin typeface="Times New Roman" pitchFamily="34" charset="0"/>
-                <a:ea typeface="Times New Roman" pitchFamily="34" charset="-122"/>
-                <a:cs typeface="Times New Roman" pitchFamily="34" charset="-120"/>
-              </a:rPr>
-              <a:t>Teacher's Note</a:t>
-            </a:r>
-            <a:endParaRPr lang="en-US" sz="3600" dirty="0"/>
-          </a:p>
-        </p:txBody>
-      </p:sp>
-      <p:sp>
-        <p:nvSpPr>
-          <p:cNvPr id="5" name="Text 2"/>
-          <p:cNvSpPr/>
-          <p:nvPr/>
-        </p:nvSpPr>
-        <p:spPr>
-          <a:xfrm>
-            <a:off x="2697480" y="1783080"/>
-            <a:ext cx="9174175" cy="4663440"/>
-          </a:xfrm>
-          <a:prstGeom prst="rect">
-            <a:avLst/>
-          </a:prstGeom>
-          <a:noFill/>
-          <a:ln/>
-        </p:spPr>
-        <p:txBody>
-          <a:bodyPr wrap="square" lIns="0" tIns="0" rIns="0" bIns="0" rtlCol="0" anchor="t"/>
-          <a:lstStyle/>
-          <a:p>
-            <a:pPr algn="l" marL="342900" indent="-342900">
-              <a:spcAft>
-                <a:spcPts val="800"/>
-              </a:spcAft>
-              <a:buSzPct val="100000"/>
-              <a:buChar char="•"/>
-            </a:pPr>
-            <a:r>
-              <a:rPr lang="en-US" sz="2000" dirty="0">
-                <a:solidFill>
-                  <a:srgbClr val="111111"/>
-                </a:solidFill>
-                <a:latin typeface="Calibri" pitchFamily="34" charset="0"/>
-                <a:ea typeface="Calibri" pitchFamily="34" charset="-122"/>
-                <a:cs typeface="Calibri" pitchFamily="34" charset="-120"/>
-              </a:rPr>
-              <a:t>Timing: Homework correction, plan, objectives 8 min | Recall, situation, action 10 min | 5 activities 30 min | Board summary (copying) 30 min | Evaluation, remediation 10 min | Homework, next lesson 5 min | Logbook 7 min</a:t>
-            </a:r>
-            <a:endParaRPr lang="en-US" sz="2000" dirty="0"/>
-          </a:p>
-          <a:p>
-            <a:pPr algn="l" marL="342900" indent="-342900">
-              <a:spcAft>
-                <a:spcPts val="800"/>
-              </a:spcAft>
-              <a:buSzPct val="100000"/>
-              <a:buChar char="•"/>
-            </a:pPr>
-            <a:r>
-              <a:rPr lang="en-US" sz="2000" dirty="0">
-                <a:solidFill>
-                  <a:srgbClr val="111111"/>
-                </a:solidFill>
-                <a:latin typeface="Calibri" pitchFamily="34" charset="0"/>
-                <a:ea typeface="Calibri" pitchFamily="34" charset="-122"/>
-                <a:cs typeface="Calibri" pitchFamily="34" charset="-120"/>
-              </a:rPr>
-              <a:t>Activity 4 is an animation (GIF): it plays automatically in slide-show mode.</a:t>
-            </a:r>
-            <a:endParaRPr lang="en-US" sz="2000" dirty="0"/>
-          </a:p>
-          <a:p>
-            <a:pPr algn="l" marL="342900" indent="-342900">
-              <a:spcAft>
-                <a:spcPts val="800"/>
-              </a:spcAft>
-              <a:buSzPct val="100000"/>
-              <a:buChar char="•"/>
-            </a:pPr>
-            <a:r>
-              <a:rPr lang="en-US" sz="2000" dirty="0">
-                <a:solidFill>
-                  <a:srgbClr val="111111"/>
-                </a:solidFill>
-                <a:latin typeface="Calibri" pitchFamily="34" charset="0"/>
-                <a:ea typeface="Calibri" pitchFamily="34" charset="-122"/>
-                <a:cs typeface="Calibri" pitchFamily="34" charset="-120"/>
-              </a:rPr>
-              <a:t>Without the projector (Activity 1): show a stone.</a:t>
-            </a:r>
-            <a:endParaRPr lang="en-US" sz="2000" dirty="0"/>
-          </a:p>
-          <a:p>
-            <a:pPr algn="l" marL="342900" indent="-342900">
-              <a:spcAft>
-                <a:spcPts val="800"/>
-              </a:spcAft>
-              <a:buSzPct val="100000"/>
-              <a:buChar char="•"/>
-            </a:pPr>
-            <a:r>
-              <a:rPr lang="en-US" sz="2000" dirty="0">
-                <a:solidFill>
-                  <a:srgbClr val="111111"/>
-                </a:solidFill>
-                <a:latin typeface="Calibri" pitchFamily="34" charset="0"/>
-                <a:ea typeface="Calibri" pitchFamily="34" charset="-122"/>
-                <a:cs typeface="Calibri" pitchFamily="34" charset="-120"/>
-              </a:rPr>
-              <a:t>Without the projector (Activity 2): draw three circles.</a:t>
-            </a:r>
-            <a:endParaRPr lang="en-US" sz="2000" dirty="0"/>
-          </a:p>
-          <a:p>
-            <a:pPr algn="l" marL="342900" indent="-342900">
-              <a:spcAft>
-                <a:spcPts val="800"/>
-              </a:spcAft>
-              <a:buSzPct val="100000"/>
-              <a:buChar char="•"/>
-            </a:pPr>
-            <a:r>
-              <a:rPr lang="en-US" sz="2000" dirty="0">
-                <a:solidFill>
-                  <a:srgbClr val="111111"/>
-                </a:solidFill>
-                <a:latin typeface="Calibri" pitchFamily="34" charset="0"/>
-                <a:ea typeface="Calibri" pitchFamily="34" charset="-122"/>
-                <a:cs typeface="Calibri" pitchFamily="34" charset="-120"/>
-              </a:rPr>
-              <a:t>Without the projector (Activity 3): describe Mount Cameroon erupting.</a:t>
-            </a:r>
-            <a:endParaRPr lang="en-US" sz="2000" dirty="0"/>
-          </a:p>
-          <a:p>
-            <a:pPr algn="l" marL="342900" indent="-342900">
-              <a:spcAft>
-                <a:spcPts val="800"/>
-              </a:spcAft>
-              <a:buSzPct val="100000"/>
-              <a:buChar char="•"/>
-            </a:pPr>
-            <a:r>
-              <a:rPr lang="en-US" sz="2000" dirty="0">
-                <a:solidFill>
-                  <a:srgbClr val="111111"/>
-                </a:solidFill>
-                <a:latin typeface="Calibri" pitchFamily="34" charset="0"/>
-                <a:ea typeface="Calibri" pitchFamily="34" charset="-122"/>
-                <a:cs typeface="Calibri" pitchFamily="34" charset="-120"/>
-              </a:rPr>
-              <a:t>Without the projector (Activity 4): compare with the yolk of an egg.</a:t>
-            </a:r>
-            <a:endParaRPr lang="en-US" sz="2000" dirty="0"/>
-          </a:p>
-          <a:p>
-            <a:pPr algn="l" marL="342900" indent="-342900">
-              <a:spcAft>
-                <a:spcPts val="800"/>
-              </a:spcAft>
-              <a:buSzPct val="100000"/>
-              <a:buChar char="•"/>
-            </a:pPr>
-            <a:r>
-              <a:rPr lang="en-US" sz="2000" dirty="0">
-                <a:solidFill>
-                  <a:srgbClr val="111111"/>
-                </a:solidFill>
-                <a:latin typeface="Calibri" pitchFamily="34" charset="0"/>
-                <a:ea typeface="Calibri" pitchFamily="34" charset="-122"/>
-                <a:cs typeface="Calibri" pitchFamily="34" charset="-120"/>
-              </a:rPr>
-              <a:t>Without the projector (Activity 5): draw a cross-section of the Earth.</a:t>
-            </a:r>
-            <a:endParaRPr lang="en-US" sz="2000" dirty="0"/>
-          </a:p>
-        </p:txBody>
-      </p:sp>
-      <p:sp>
-        <p:nvSpPr>
-          <p:cNvPr id="25" name="Slide Number Placeholder 0"/>
-          <p:cNvSpPr>
-            <a:spLocks noGrp="1"/>
-          </p:cNvSpPr>
-          <p:nvPr>
-            <p:ph type="sldNum" sz="quarter" idx="4294967295"/>
-          </p:nvPr>
-        </p:nvSpPr>
-        <p:spPr>
-          <a:xfrm>
-            <a:off x="27432" y="91440"/>
-            <a:ext cx="585216" cy="475488"/>
-          </a:xfrm>
-          <a:prstGeom prst="rect">
-            <a:avLst/>
-          </a:prstGeom>
-          <a:extLst>
-            <a:ext uri="{C572A759-6A51-4108-AA02-DFA0A04FC94B}">
-              <ma14:wrappingTextBoxFlag xmlns:ma14="http://schemas.microsoft.com/office/mac/drawingml/2011/main" val="0"/>
-            </a:ext>
-          </a:extLst>
-        </p:spPr>
-        <p:txBody>
-          <a:bodyPr/>
-          <a:lstStyle>
-            <a:lvl1pPr>
-              <a:defRPr sz="2000">
-                <a:solidFill>
-                  <a:srgbClr val="FFFFFF"/>
-                </a:solidFill>
-                <a:latin typeface="Calibri"/>
-                <a:ea typeface="Calibri"/>
-                <a:cs typeface="Calibri"/>
-              </a:defRPr>
-            </a:lvl1pPr>
-          </a:lstStyle>
-          <a:p>
-            <a:pPr algn="ctr"/>
-            <a:fld id="{F7021451-1387-4CA6-816F-3879F97B5CBC}" type="slidenum">
-              <a:rPr b="1" lang="en-US"/>
-              <a:t>48</a:t>
-            </a:fld>
-            <a:endParaRPr lang="en-US"/>
-          </a:p>
-        </p:txBody>
-      </p:sp>
-    </p:spTree>
-  </p:cSld>
-  <p:clrMapOvr>
-    <a:masterClrMapping/>
-  </p:clrMapOvr>
-</p:sld>
-</file>
-
-<file path=ppt/slides/slide49.xml><?xml version="1.0" encoding="utf-8"?>
-<p:sld xmlns:a="http://schemas.openxmlformats.org/drawingml/2006/main" xmlns:r="http://schemas.openxmlformats.org/officeDocument/2006/relationships" xmlns:p="http://schemas.openxmlformats.org/presentationml/2006/main">
-  <p:cSld name="Slide 49">
-    <p:spTree>
-      <p:nvGrpSpPr>
-        <p:cNvPr id="1" name=""/>
-        <p:cNvGrpSpPr/>
-        <p:nvPr/>
-      </p:nvGrpSpPr>
-      <p:grpSpPr>
-        <a:xfrm>
-          <a:off x="0" y="0"/>
-          <a:ext cx="0" cy="0"/>
-          <a:chOff x="0" y="0"/>
-          <a:chExt cx="0" cy="0"/>
-        </a:xfrm>
-      </p:grpSpPr>
-      <p:sp>
-        <p:nvSpPr>
-          <p:cNvPr id="2" name="Text 0"/>
-          <p:cNvSpPr/>
-          <p:nvPr/>
-        </p:nvSpPr>
-        <p:spPr>
-          <a:xfrm>
-            <a:off x="457200" y="713232"/>
-            <a:ext cx="11368735" cy="274320"/>
-          </a:xfrm>
-          <a:prstGeom prst="rect">
-            <a:avLst/>
-          </a:prstGeom>
-          <a:noFill/>
-          <a:ln/>
-        </p:spPr>
-        <p:txBody>
-          <a:bodyPr wrap="square" lIns="0" tIns="0" rIns="0" bIns="0" rtlCol="0" anchor="ctr"/>
-          <a:lstStyle/>
-          <a:p>
-            <a:pPr algn="r" indent="0" marL="0">
-              <a:buNone/>
-            </a:pPr>
-            <a:r>
-              <a:rPr lang="en-US" sz="1400" b="1" dirty="0">
-                <a:solidFill>
-                  <a:srgbClr val="1C3F6E"/>
-                </a:solidFill>
-                <a:latin typeface="Calibri" pitchFamily="34" charset="0"/>
-                <a:ea typeface="Calibri" pitchFamily="34" charset="-122"/>
-                <a:cs typeface="Calibri" pitchFamily="34" charset="-120"/>
-              </a:rPr>
-              <a:t>REFERENCES</a:t>
-            </a:r>
-            <a:endParaRPr lang="en-US" sz="1400" dirty="0"/>
-          </a:p>
-        </p:txBody>
-      </p:sp>
-      <p:pic>
-        <p:nvPicPr>
-          <p:cNvPr id="3" name="Image 0" descr="/home/claude/f4/img/minesec_sheet.png">    </p:cNvPr>
-          <p:cNvPicPr>
-            <a:picLocks noChangeAspect="1"/>
-          </p:cNvPicPr>
-          <p:nvPr/>
-        </p:nvPicPr>
-        <p:blipFill>
-          <a:blip r:embed="rId1"/>
-          <a:stretch>
-            <a:fillRect/>
-          </a:stretch>
-        </p:blipFill>
-        <p:spPr>
-          <a:xfrm>
-            <a:off x="0" y="658368"/>
-            <a:ext cx="5120640" cy="5833872"/>
-          </a:xfrm>
-          <a:prstGeom prst="rect">
-            <a:avLst/>
-          </a:prstGeom>
-        </p:spPr>
-      </p:pic>
-      <p:sp>
-        <p:nvSpPr>
-          <p:cNvPr id="4" name="Text 1"/>
-          <p:cNvSpPr/>
-          <p:nvPr/>
-        </p:nvSpPr>
-        <p:spPr>
-          <a:xfrm>
-            <a:off x="5349240" y="1005840"/>
-            <a:ext cx="6522415" cy="731520"/>
-          </a:xfrm>
-          <a:prstGeom prst="rect">
-            <a:avLst/>
-          </a:prstGeom>
-          <a:noFill/>
-          <a:ln/>
-        </p:spPr>
-        <p:txBody>
-          <a:bodyPr wrap="square" lIns="0" tIns="0" rIns="0" bIns="0" rtlCol="0" anchor="ctr">
-            <a:normAutofit/>
-          </a:bodyPr>
-          <a:lstStyle/>
-          <a:p>
-            <a:pPr algn="ctr" indent="0" marL="0">
-              <a:buNone/>
-            </a:pPr>
-            <a:r>
-              <a:rPr lang="en-US" sz="3600" b="1" dirty="0">
-                <a:solidFill>
-                  <a:srgbClr val="990011"/>
-                </a:solidFill>
-                <a:latin typeface="Times New Roman" pitchFamily="34" charset="0"/>
-                <a:ea typeface="Times New Roman" pitchFamily="34" charset="-122"/>
-                <a:cs typeface="Times New Roman" pitchFamily="34" charset="-120"/>
-              </a:rPr>
-              <a:t>References</a:t>
-            </a:r>
-            <a:endParaRPr lang="en-US" sz="3600" dirty="0"/>
-          </a:p>
-        </p:txBody>
-      </p:sp>
-      <p:sp>
-        <p:nvSpPr>
-          <p:cNvPr id="5" name="Text 2"/>
-          <p:cNvSpPr/>
-          <p:nvPr/>
-        </p:nvSpPr>
-        <p:spPr>
-          <a:xfrm>
-            <a:off x="5349240" y="1783080"/>
-            <a:ext cx="6522415" cy="4663440"/>
-          </a:xfrm>
-          <a:prstGeom prst="rect">
-            <a:avLst/>
-          </a:prstGeom>
-          <a:noFill/>
-          <a:ln/>
-        </p:spPr>
-        <p:txBody>
-          <a:bodyPr wrap="square" lIns="0" tIns="0" rIns="0" bIns="0" rtlCol="0" anchor="t"/>
-          <a:lstStyle/>
-          <a:p>
-            <a:pPr algn="l" marL="342900" indent="-342900">
-              <a:spcAft>
-                <a:spcPts val="800"/>
-              </a:spcAft>
-              <a:buSzPct val="100000"/>
-              <a:buChar char="•"/>
-            </a:pPr>
-            <a:r>
-              <a:rPr lang="en-US" sz="1800" dirty="0">
-                <a:solidFill>
-                  <a:srgbClr val="111111"/>
-                </a:solidFill>
-                <a:latin typeface="Calibri" pitchFamily="34" charset="0"/>
-                <a:ea typeface="Calibri" pitchFamily="34" charset="-122"/>
-                <a:cs typeface="Calibri" pitchFamily="34" charset="-120"/>
-              </a:rPr>
-              <a:t>Geography Syllabus, Forms I–V, MINESEC (2023) — Form 1, Module 3: Protection from the Wrath of Nature.</a:t>
-            </a:r>
-            <a:endParaRPr lang="en-US" sz="1800" dirty="0"/>
-          </a:p>
-          <a:p>
-            <a:pPr algn="l" marL="342900" indent="-342900">
-              <a:spcAft>
-                <a:spcPts val="800"/>
-              </a:spcAft>
-              <a:buSzPct val="100000"/>
-              <a:buChar char="•"/>
-            </a:pPr>
-            <a:r>
-              <a:rPr lang="en-US" sz="1800" dirty="0">
-                <a:solidFill>
-                  <a:srgbClr val="111111"/>
-                </a:solidFill>
-                <a:latin typeface="Calibri" pitchFamily="34" charset="0"/>
-                <a:ea typeface="Calibri" pitchFamily="34" charset="-122"/>
-                <a:cs typeface="Calibri" pitchFamily="34" charset="-120"/>
-              </a:rPr>
-              <a:t>Photo, Activity 1: “Laterite soil bricks in Richard Rebello's farm” by India Water Portal, CC BY-NC-SA 2.0, via Flickr (https://www.flickr.com/photos/21623815@N03/10720461943)</a:t>
-            </a:r>
-            <a:endParaRPr lang="en-US" sz="1800" dirty="0"/>
-          </a:p>
-          <a:p>
-            <a:pPr algn="l" marL="342900" indent="-342900">
-              <a:spcAft>
-                <a:spcPts val="800"/>
-              </a:spcAft>
-              <a:buSzPct val="100000"/>
-              <a:buChar char="•"/>
-            </a:pPr>
-            <a:r>
-              <a:rPr lang="en-US" sz="1800" dirty="0">
-                <a:solidFill>
-                  <a:srgbClr val="111111"/>
-                </a:solidFill>
-                <a:latin typeface="Calibri" pitchFamily="34" charset="0"/>
-                <a:ea typeface="Calibri" pitchFamily="34" charset="-122"/>
-                <a:cs typeface="Calibri" pitchFamily="34" charset="-120"/>
-              </a:rPr>
-              <a:t>Photo, Activity 3: “Happy Anniversary Hawaii” by U.S. Geological Survey, CC0 1.0, via Flickr (https://www.flickr.com/photos/27784370@N05/14802198589)</a:t>
-            </a:r>
-            <a:endParaRPr lang="en-US" sz="1800" dirty="0"/>
-          </a:p>
-          <a:p>
-            <a:pPr algn="l" marL="342900" indent="-342900">
-              <a:spcAft>
-                <a:spcPts val="800"/>
-              </a:spcAft>
-              <a:buSzPct val="100000"/>
-              <a:buChar char="•"/>
-            </a:pPr>
-            <a:r>
-              <a:rPr lang="en-US" sz="1800" dirty="0">
-                <a:solidFill>
-                  <a:srgbClr val="111111"/>
-                </a:solidFill>
-                <a:latin typeface="Calibri" pitchFamily="34" charset="0"/>
-                <a:ea typeface="Calibri" pitchFamily="34" charset="-122"/>
-                <a:cs typeface="Calibri" pitchFamily="34" charset="-120"/>
-              </a:rPr>
-              <a:t>Diagrams and animations: drawn for this lesson (Geography Department).</a:t>
-            </a:r>
-            <a:endParaRPr lang="en-US" sz="1800" dirty="0"/>
-          </a:p>
-        </p:txBody>
-      </p:sp>
-      <p:sp>
-        <p:nvSpPr>
-          <p:cNvPr id="25" name="Slide Number Placeholder 0"/>
-          <p:cNvSpPr>
-            <a:spLocks noGrp="1"/>
-          </p:cNvSpPr>
-          <p:nvPr>
-            <p:ph type="sldNum" sz="quarter" idx="4294967295"/>
-          </p:nvPr>
-        </p:nvSpPr>
-        <p:spPr>
-          <a:xfrm>
-            <a:off x="27432" y="91440"/>
-            <a:ext cx="585216" cy="475488"/>
-          </a:xfrm>
-          <a:prstGeom prst="rect">
-            <a:avLst/>
-          </a:prstGeom>
-          <a:extLst>
-            <a:ext uri="{C572A759-6A51-4108-AA02-DFA0A04FC94B}">
-              <ma14:wrappingTextBoxFlag xmlns:ma14="http://schemas.microsoft.com/office/mac/drawingml/2011/main" val="0"/>
-            </a:ext>
-          </a:extLst>
-        </p:spPr>
-        <p:txBody>
-          <a:bodyPr/>
-          <a:lstStyle>
-            <a:lvl1pPr>
-              <a:defRPr sz="2000">
-                <a:solidFill>
-                  <a:srgbClr val="FFFFFF"/>
-                </a:solidFill>
-                <a:latin typeface="Calibri"/>
-                <a:ea typeface="Calibri"/>
-                <a:cs typeface="Calibri"/>
-              </a:defRPr>
-            </a:lvl1pPr>
-          </a:lstStyle>
-          <a:p>
-            <a:pPr algn="ctr"/>
-            <a:fld id="{F7021451-1387-4CA6-816F-3879F97B5CBC}" type="slidenum">
-              <a:rPr b="1" lang="en-US"/>
               <a:t>49</a:t>
             </a:fld>
             <a:endParaRPr lang="en-US"/>
@@ -19486,6 +19649,635 @@
 </p:sld>
 </file>
 
+<file path=ppt/slides/slide50.xml><?xml version="1.0" encoding="utf-8"?>
+<p:sld xmlns:a="http://schemas.openxmlformats.org/drawingml/2006/main" xmlns:r="http://schemas.openxmlformats.org/officeDocument/2006/relationships" xmlns:p="http://schemas.openxmlformats.org/presentationml/2006/main">
+  <p:cSld name="Slide 50">
+    <p:spTree>
+      <p:nvGrpSpPr>
+        <p:cNvPr id="1" name=""/>
+        <p:cNvGrpSpPr/>
+        <p:nvPr/>
+      </p:nvGrpSpPr>
+      <p:grpSpPr>
+        <a:xfrm>
+          <a:off x="0" y="0"/>
+          <a:ext cx="0" cy="0"/>
+          <a:chOff x="0" y="0"/>
+          <a:chExt cx="0" cy="0"/>
+        </a:xfrm>
+      </p:grpSpPr>
+      <p:sp>
+        <p:nvSpPr>
+          <p:cNvPr id="2" name="Text 0"/>
+          <p:cNvSpPr/>
+          <p:nvPr/>
+        </p:nvSpPr>
+        <p:spPr>
+          <a:xfrm>
+            <a:off x="457200" y="713232"/>
+            <a:ext cx="11368735" cy="274320"/>
+          </a:xfrm>
+          <a:prstGeom prst="rect">
+            <a:avLst/>
+          </a:prstGeom>
+          <a:noFill/>
+          <a:ln/>
+        </p:spPr>
+        <p:txBody>
+          <a:bodyPr wrap="square" lIns="0" tIns="0" rIns="0" bIns="0" rtlCol="0" anchor="ctr"/>
+          <a:lstStyle/>
+          <a:p>
+            <a:pPr algn="r" indent="0" marL="0">
+              <a:buNone/>
+            </a:pPr>
+            <a:r>
+              <a:rPr lang="en-US" sz="1400" b="1" dirty="0">
+                <a:solidFill>
+                  <a:srgbClr val="1C3F6E"/>
+                </a:solidFill>
+                <a:latin typeface="Calibri" pitchFamily="34" charset="0"/>
+                <a:ea typeface="Calibri" pitchFamily="34" charset="-122"/>
+                <a:cs typeface="Calibri" pitchFamily="34" charset="-120"/>
+              </a:rPr>
+              <a:t>TEACHER'S NOTE</a:t>
+            </a:r>
+            <a:endParaRPr lang="en-US" sz="1400" dirty="0"/>
+          </a:p>
+        </p:txBody>
+      </p:sp>
+      <p:pic>
+        <p:nvPicPr>
+          <p:cNvPr id="3" name="Image 0" descr="/home/claude/f4/img/minesec_sheet.png">    </p:cNvPr>
+          <p:cNvPicPr>
+            <a:picLocks noChangeAspect="1"/>
+          </p:cNvPicPr>
+          <p:nvPr/>
+        </p:nvPicPr>
+        <p:blipFill>
+          <a:blip r:embed="rId1"/>
+          <a:stretch>
+            <a:fillRect/>
+          </a:stretch>
+        </p:blipFill>
+        <p:spPr>
+          <a:xfrm>
+            <a:off x="0" y="658368"/>
+            <a:ext cx="2468880" cy="5833872"/>
+          </a:xfrm>
+          <a:prstGeom prst="rect">
+            <a:avLst/>
+          </a:prstGeom>
+        </p:spPr>
+      </p:pic>
+      <p:sp>
+        <p:nvSpPr>
+          <p:cNvPr id="4" name="Text 1"/>
+          <p:cNvSpPr/>
+          <p:nvPr/>
+        </p:nvSpPr>
+        <p:spPr>
+          <a:xfrm>
+            <a:off x="2697480" y="1005840"/>
+            <a:ext cx="9174175" cy="731520"/>
+          </a:xfrm>
+          <a:prstGeom prst="rect">
+            <a:avLst/>
+          </a:prstGeom>
+          <a:noFill/>
+          <a:ln/>
+        </p:spPr>
+        <p:txBody>
+          <a:bodyPr wrap="square" lIns="0" tIns="0" rIns="0" bIns="0" rtlCol="0" anchor="ctr">
+            <a:normAutofit/>
+          </a:bodyPr>
+          <a:lstStyle/>
+          <a:p>
+            <a:pPr algn="ctr" indent="0" marL="0">
+              <a:buNone/>
+            </a:pPr>
+            <a:r>
+              <a:rPr lang="en-US" sz="3600" b="1" dirty="0">
+                <a:solidFill>
+                  <a:srgbClr val="990011"/>
+                </a:solidFill>
+                <a:latin typeface="Times New Roman" pitchFamily="34" charset="0"/>
+                <a:ea typeface="Times New Roman" pitchFamily="34" charset="-122"/>
+                <a:cs typeface="Times New Roman" pitchFamily="34" charset="-120"/>
+              </a:rPr>
+              <a:t>Teacher's Note</a:t>
+            </a:r>
+            <a:endParaRPr lang="en-US" sz="3600" dirty="0"/>
+          </a:p>
+        </p:txBody>
+      </p:sp>
+      <p:sp>
+        <p:nvSpPr>
+          <p:cNvPr id="5" name="Text 2"/>
+          <p:cNvSpPr/>
+          <p:nvPr/>
+        </p:nvSpPr>
+        <p:spPr>
+          <a:xfrm>
+            <a:off x="2697480" y="1783080"/>
+            <a:ext cx="9174175" cy="4663440"/>
+          </a:xfrm>
+          <a:prstGeom prst="rect">
+            <a:avLst/>
+          </a:prstGeom>
+          <a:noFill/>
+          <a:ln/>
+        </p:spPr>
+        <p:txBody>
+          <a:bodyPr wrap="square" lIns="0" tIns="0" rIns="0" bIns="0" rtlCol="0" anchor="t"/>
+          <a:lstStyle/>
+          <a:p>
+            <a:pPr algn="l" marL="342900" indent="-342900">
+              <a:spcAft>
+                <a:spcPts val="800"/>
+              </a:spcAft>
+              <a:buSzPct val="100000"/>
+              <a:buChar char="•"/>
+            </a:pPr>
+            <a:r>
+              <a:rPr lang="en-US" sz="2000" dirty="0">
+                <a:solidFill>
+                  <a:srgbClr val="111111"/>
+                </a:solidFill>
+                <a:latin typeface="Calibri" pitchFamily="34" charset="0"/>
+                <a:ea typeface="Calibri" pitchFamily="34" charset="-122"/>
+                <a:cs typeface="Calibri" pitchFamily="34" charset="-120"/>
+              </a:rPr>
+              <a:t>Timing: Homework correction, plan, objectives 8 min | Recall, situation, action 10 min | 5 activities 30 min | Board summary (copying) 30 min | Evaluation, remediation 10 min | Homework, next lesson 5 min | Logbook 7 min</a:t>
+            </a:r>
+            <a:endParaRPr lang="en-US" sz="2000" dirty="0"/>
+          </a:p>
+          <a:p>
+            <a:pPr algn="l" marL="342900" indent="-342900">
+              <a:spcAft>
+                <a:spcPts val="800"/>
+              </a:spcAft>
+              <a:buSzPct val="100000"/>
+              <a:buChar char="•"/>
+            </a:pPr>
+            <a:r>
+              <a:rPr lang="en-US" sz="2000" dirty="0">
+                <a:solidFill>
+                  <a:srgbClr val="111111"/>
+                </a:solidFill>
+                <a:latin typeface="Calibri" pitchFamily="34" charset="0"/>
+                <a:ea typeface="Calibri" pitchFamily="34" charset="-122"/>
+                <a:cs typeface="Calibri" pitchFamily="34" charset="-120"/>
+              </a:rPr>
+              <a:t>Activity 3 is an animation (GIF): it plays automatically in slide-show mode.</a:t>
+            </a:r>
+            <a:endParaRPr lang="en-US" sz="2000" dirty="0"/>
+          </a:p>
+          <a:p>
+            <a:pPr algn="l" marL="342900" indent="-342900">
+              <a:spcAft>
+                <a:spcPts val="800"/>
+              </a:spcAft>
+              <a:buSzPct val="100000"/>
+              <a:buChar char="•"/>
+            </a:pPr>
+            <a:r>
+              <a:rPr lang="en-US" sz="2000" dirty="0">
+                <a:solidFill>
+                  <a:srgbClr val="111111"/>
+                </a:solidFill>
+                <a:latin typeface="Calibri" pitchFamily="34" charset="0"/>
+                <a:ea typeface="Calibri" pitchFamily="34" charset="-122"/>
+                <a:cs typeface="Calibri" pitchFamily="34" charset="-120"/>
+              </a:rPr>
+              <a:t>Without the projector (Activity 1): show a stone.</a:t>
+            </a:r>
+            <a:endParaRPr lang="en-US" sz="2000" dirty="0"/>
+          </a:p>
+          <a:p>
+            <a:pPr algn="l" marL="342900" indent="-342900">
+              <a:spcAft>
+                <a:spcPts val="800"/>
+              </a:spcAft>
+              <a:buSzPct val="100000"/>
+              <a:buChar char="•"/>
+            </a:pPr>
+            <a:r>
+              <a:rPr lang="en-US" sz="2000" dirty="0">
+                <a:solidFill>
+                  <a:srgbClr val="111111"/>
+                </a:solidFill>
+                <a:latin typeface="Calibri" pitchFamily="34" charset="0"/>
+                <a:ea typeface="Calibri" pitchFamily="34" charset="-122"/>
+                <a:cs typeface="Calibri" pitchFamily="34" charset="-120"/>
+              </a:rPr>
+              <a:t>Without the projector (Activity 2): describe Mount Cameroon erupting.</a:t>
+            </a:r>
+            <a:endParaRPr lang="en-US" sz="2000" dirty="0"/>
+          </a:p>
+          <a:p>
+            <a:pPr algn="l" marL="342900" indent="-342900">
+              <a:spcAft>
+                <a:spcPts val="800"/>
+              </a:spcAft>
+              <a:buSzPct val="100000"/>
+              <a:buChar char="•"/>
+            </a:pPr>
+            <a:r>
+              <a:rPr lang="en-US" sz="2000" dirty="0">
+                <a:solidFill>
+                  <a:srgbClr val="111111"/>
+                </a:solidFill>
+                <a:latin typeface="Calibri" pitchFamily="34" charset="0"/>
+                <a:ea typeface="Calibri" pitchFamily="34" charset="-122"/>
+                <a:cs typeface="Calibri" pitchFamily="34" charset="-120"/>
+              </a:rPr>
+              <a:t>Without the projector (Activity 3): compare with the yolk of an egg.</a:t>
+            </a:r>
+            <a:endParaRPr lang="en-US" sz="2000" dirty="0"/>
+          </a:p>
+          <a:p>
+            <a:pPr algn="l" marL="342900" indent="-342900">
+              <a:spcAft>
+                <a:spcPts val="800"/>
+              </a:spcAft>
+              <a:buSzPct val="100000"/>
+              <a:buChar char="•"/>
+            </a:pPr>
+            <a:r>
+              <a:rPr lang="en-US" sz="2000" dirty="0">
+                <a:solidFill>
+                  <a:srgbClr val="111111"/>
+                </a:solidFill>
+                <a:latin typeface="Calibri" pitchFamily="34" charset="0"/>
+                <a:ea typeface="Calibri" pitchFamily="34" charset="-122"/>
+                <a:cs typeface="Calibri" pitchFamily="34" charset="-120"/>
+              </a:rPr>
+              <a:t>Without the projector (Activity 4): draw three circles.</a:t>
+            </a:r>
+            <a:endParaRPr lang="en-US" sz="2000" dirty="0"/>
+          </a:p>
+          <a:p>
+            <a:pPr algn="l" marL="342900" indent="-342900">
+              <a:spcAft>
+                <a:spcPts val="800"/>
+              </a:spcAft>
+              <a:buSzPct val="100000"/>
+              <a:buChar char="•"/>
+            </a:pPr>
+            <a:r>
+              <a:rPr lang="en-US" sz="2000" dirty="0">
+                <a:solidFill>
+                  <a:srgbClr val="111111"/>
+                </a:solidFill>
+                <a:latin typeface="Calibri" pitchFamily="34" charset="0"/>
+                <a:ea typeface="Calibri" pitchFamily="34" charset="-122"/>
+                <a:cs typeface="Calibri" pitchFamily="34" charset="-120"/>
+              </a:rPr>
+              <a:t>Without the projector (Activity 5): draw a cross-section of the Earth.</a:t>
+            </a:r>
+            <a:endParaRPr lang="en-US" sz="2000" dirty="0"/>
+          </a:p>
+        </p:txBody>
+      </p:sp>
+      <p:sp>
+        <p:nvSpPr>
+          <p:cNvPr id="25" name="Slide Number Placeholder 0"/>
+          <p:cNvSpPr>
+            <a:spLocks noGrp="1"/>
+          </p:cNvSpPr>
+          <p:nvPr>
+            <p:ph type="sldNum" sz="quarter" idx="4294967295"/>
+          </p:nvPr>
+        </p:nvSpPr>
+        <p:spPr>
+          <a:xfrm>
+            <a:off x="27432" y="91440"/>
+            <a:ext cx="585216" cy="475488"/>
+          </a:xfrm>
+          <a:prstGeom prst="rect">
+            <a:avLst/>
+          </a:prstGeom>
+          <a:extLst>
+            <a:ext uri="{C572A759-6A51-4108-AA02-DFA0A04FC94B}">
+              <ma14:wrappingTextBoxFlag xmlns:ma14="http://schemas.microsoft.com/office/mac/drawingml/2011/main" val="0"/>
+            </a:ext>
+          </a:extLst>
+        </p:spPr>
+        <p:txBody>
+          <a:bodyPr/>
+          <a:lstStyle>
+            <a:lvl1pPr>
+              <a:defRPr sz="2000">
+                <a:solidFill>
+                  <a:srgbClr val="FFFFFF"/>
+                </a:solidFill>
+                <a:latin typeface="Calibri"/>
+                <a:ea typeface="Calibri"/>
+                <a:cs typeface="Calibri"/>
+              </a:defRPr>
+            </a:lvl1pPr>
+          </a:lstStyle>
+          <a:p>
+            <a:pPr algn="ctr"/>
+            <a:fld id="{F7021451-1387-4CA6-816F-3879F97B5CBC}" type="slidenum">
+              <a:rPr b="1" lang="en-US"/>
+              <a:t>50</a:t>
+            </a:fld>
+            <a:endParaRPr lang="en-US"/>
+          </a:p>
+        </p:txBody>
+      </p:sp>
+    </p:spTree>
+  </p:cSld>
+  <p:clrMapOvr>
+    <a:masterClrMapping/>
+  </p:clrMapOvr>
+</p:sld>
+</file>
+
+<file path=ppt/slides/slide51.xml><?xml version="1.0" encoding="utf-8"?>
+<p:sld xmlns:a="http://schemas.openxmlformats.org/drawingml/2006/main" xmlns:r="http://schemas.openxmlformats.org/officeDocument/2006/relationships" xmlns:p="http://schemas.openxmlformats.org/presentationml/2006/main">
+  <p:cSld name="Slide 51">
+    <p:spTree>
+      <p:nvGrpSpPr>
+        <p:cNvPr id="1" name=""/>
+        <p:cNvGrpSpPr/>
+        <p:nvPr/>
+      </p:nvGrpSpPr>
+      <p:grpSpPr>
+        <a:xfrm>
+          <a:off x="0" y="0"/>
+          <a:ext cx="0" cy="0"/>
+          <a:chOff x="0" y="0"/>
+          <a:chExt cx="0" cy="0"/>
+        </a:xfrm>
+      </p:grpSpPr>
+      <p:sp>
+        <p:nvSpPr>
+          <p:cNvPr id="2" name="Text 0"/>
+          <p:cNvSpPr/>
+          <p:nvPr/>
+        </p:nvSpPr>
+        <p:spPr>
+          <a:xfrm>
+            <a:off x="457200" y="713232"/>
+            <a:ext cx="11368735" cy="274320"/>
+          </a:xfrm>
+          <a:prstGeom prst="rect">
+            <a:avLst/>
+          </a:prstGeom>
+          <a:noFill/>
+          <a:ln/>
+        </p:spPr>
+        <p:txBody>
+          <a:bodyPr wrap="square" lIns="0" tIns="0" rIns="0" bIns="0" rtlCol="0" anchor="ctr"/>
+          <a:lstStyle/>
+          <a:p>
+            <a:pPr algn="r" indent="0" marL="0">
+              <a:buNone/>
+            </a:pPr>
+            <a:r>
+              <a:rPr lang="en-US" sz="1400" b="1" dirty="0">
+                <a:solidFill>
+                  <a:srgbClr val="1C3F6E"/>
+                </a:solidFill>
+                <a:latin typeface="Calibri" pitchFamily="34" charset="0"/>
+                <a:ea typeface="Calibri" pitchFamily="34" charset="-122"/>
+                <a:cs typeface="Calibri" pitchFamily="34" charset="-120"/>
+              </a:rPr>
+              <a:t>REFERENCES</a:t>
+            </a:r>
+            <a:endParaRPr lang="en-US" sz="1400" dirty="0"/>
+          </a:p>
+        </p:txBody>
+      </p:sp>
+      <p:pic>
+        <p:nvPicPr>
+          <p:cNvPr id="3" name="Image 0" descr="/home/claude/f4/img/minesec_sheet.png">    </p:cNvPr>
+          <p:cNvPicPr>
+            <a:picLocks noChangeAspect="1"/>
+          </p:cNvPicPr>
+          <p:nvPr/>
+        </p:nvPicPr>
+        <p:blipFill>
+          <a:blip r:embed="rId1"/>
+          <a:stretch>
+            <a:fillRect/>
+          </a:stretch>
+        </p:blipFill>
+        <p:spPr>
+          <a:xfrm>
+            <a:off x="0" y="658368"/>
+            <a:ext cx="5120640" cy="5833872"/>
+          </a:xfrm>
+          <a:prstGeom prst="rect">
+            <a:avLst/>
+          </a:prstGeom>
+        </p:spPr>
+      </p:pic>
+      <p:sp>
+        <p:nvSpPr>
+          <p:cNvPr id="4" name="Text 1"/>
+          <p:cNvSpPr/>
+          <p:nvPr/>
+        </p:nvSpPr>
+        <p:spPr>
+          <a:xfrm>
+            <a:off x="5349240" y="1005840"/>
+            <a:ext cx="6522415" cy="731520"/>
+          </a:xfrm>
+          <a:prstGeom prst="rect">
+            <a:avLst/>
+          </a:prstGeom>
+          <a:noFill/>
+          <a:ln/>
+        </p:spPr>
+        <p:txBody>
+          <a:bodyPr wrap="square" lIns="0" tIns="0" rIns="0" bIns="0" rtlCol="0" anchor="ctr">
+            <a:normAutofit/>
+          </a:bodyPr>
+          <a:lstStyle/>
+          <a:p>
+            <a:pPr algn="ctr" indent="0" marL="0">
+              <a:buNone/>
+            </a:pPr>
+            <a:r>
+              <a:rPr lang="en-US" sz="3600" b="1" dirty="0">
+                <a:solidFill>
+                  <a:srgbClr val="990011"/>
+                </a:solidFill>
+                <a:latin typeface="Times New Roman" pitchFamily="34" charset="0"/>
+                <a:ea typeface="Times New Roman" pitchFamily="34" charset="-122"/>
+                <a:cs typeface="Times New Roman" pitchFamily="34" charset="-120"/>
+              </a:rPr>
+              <a:t>References</a:t>
+            </a:r>
+            <a:endParaRPr lang="en-US" sz="3600" dirty="0"/>
+          </a:p>
+        </p:txBody>
+      </p:sp>
+      <p:sp>
+        <p:nvSpPr>
+          <p:cNvPr id="5" name="Text 2"/>
+          <p:cNvSpPr/>
+          <p:nvPr/>
+        </p:nvSpPr>
+        <p:spPr>
+          <a:xfrm>
+            <a:off x="5349240" y="1783080"/>
+            <a:ext cx="6522415" cy="4663440"/>
+          </a:xfrm>
+          <a:prstGeom prst="rect">
+            <a:avLst/>
+          </a:prstGeom>
+          <a:noFill/>
+          <a:ln/>
+        </p:spPr>
+        <p:txBody>
+          <a:bodyPr wrap="square" lIns="0" tIns="0" rIns="0" bIns="0" rtlCol="0" anchor="t"/>
+          <a:lstStyle/>
+          <a:p>
+            <a:pPr algn="l" marL="342900" indent="-342900">
+              <a:spcAft>
+                <a:spcPts val="800"/>
+              </a:spcAft>
+              <a:buSzPct val="100000"/>
+              <a:buChar char="•"/>
+            </a:pPr>
+            <a:r>
+              <a:rPr lang="en-US" sz="1800" dirty="0">
+                <a:solidFill>
+                  <a:srgbClr val="111111"/>
+                </a:solidFill>
+                <a:latin typeface="Calibri" pitchFamily="34" charset="0"/>
+                <a:ea typeface="Calibri" pitchFamily="34" charset="-122"/>
+                <a:cs typeface="Calibri" pitchFamily="34" charset="-120"/>
+              </a:rPr>
+              <a:t>Geography Syllabus, Forms I–V, MINESEC (2023) — Form 1, Module 3: Protection from the Wrath of Nature.</a:t>
+            </a:r>
+            <a:endParaRPr lang="en-US" sz="1800" dirty="0"/>
+          </a:p>
+          <a:p>
+            <a:pPr algn="l" marL="342900" indent="-342900">
+              <a:spcAft>
+                <a:spcPts val="800"/>
+              </a:spcAft>
+              <a:buSzPct val="100000"/>
+              <a:buChar char="•"/>
+            </a:pPr>
+            <a:r>
+              <a:rPr lang="en-US" sz="1800" dirty="0">
+                <a:solidFill>
+                  <a:srgbClr val="111111"/>
+                </a:solidFill>
+                <a:latin typeface="Calibri" pitchFamily="34" charset="0"/>
+                <a:ea typeface="Calibri" pitchFamily="34" charset="-122"/>
+                <a:cs typeface="Calibri" pitchFamily="34" charset="-120"/>
+              </a:rPr>
+              <a:t>Photo, Activity 1: “Laterite soil bricks in Richard Rebello's farm” by India Water Portal, CC BY-NC-SA 2.0, via Flickr (https://www.flickr.com/photos/21623815@N03/10720461943)</a:t>
+            </a:r>
+            <a:endParaRPr lang="en-US" sz="1800" dirty="0"/>
+          </a:p>
+          <a:p>
+            <a:pPr algn="l" marL="342900" indent="-342900">
+              <a:spcAft>
+                <a:spcPts val="800"/>
+              </a:spcAft>
+              <a:buSzPct val="100000"/>
+              <a:buChar char="•"/>
+            </a:pPr>
+            <a:r>
+              <a:rPr lang="en-US" sz="1800" dirty="0">
+                <a:solidFill>
+                  <a:srgbClr val="111111"/>
+                </a:solidFill>
+                <a:latin typeface="Calibri" pitchFamily="34" charset="0"/>
+                <a:ea typeface="Calibri" pitchFamily="34" charset="-122"/>
+                <a:cs typeface="Calibri" pitchFamily="34" charset="-120"/>
+              </a:rPr>
+              <a:t>Photo, Activity 2: “Happy Anniversary Hawaii” by U.S. Geological Survey, CC0 1.0, via Flickr (https://www.flickr.com/photos/27784370@N05/14802198589)</a:t>
+            </a:r>
+            <a:endParaRPr lang="en-US" sz="1800" dirty="0"/>
+          </a:p>
+          <a:p>
+            <a:pPr algn="l" marL="342900" indent="-342900">
+              <a:spcAft>
+                <a:spcPts val="800"/>
+              </a:spcAft>
+              <a:buSzPct val="100000"/>
+              <a:buChar char="•"/>
+            </a:pPr>
+            <a:r>
+              <a:rPr lang="en-US" sz="1800" dirty="0">
+                <a:solidFill>
+                  <a:srgbClr val="111111"/>
+                </a:solidFill>
+                <a:latin typeface="Calibri" pitchFamily="34" charset="0"/>
+                <a:ea typeface="Calibri" pitchFamily="34" charset="-122"/>
+                <a:cs typeface="Calibri" pitchFamily="34" charset="-120"/>
+              </a:rPr>
+              <a:t>Diagrams and animations: drawn for this lesson (Geography Department).</a:t>
+            </a:r>
+            <a:endParaRPr lang="en-US" sz="1800" dirty="0"/>
+          </a:p>
+        </p:txBody>
+      </p:sp>
+      <p:sp>
+        <p:nvSpPr>
+          <p:cNvPr id="25" name="Slide Number Placeholder 0"/>
+          <p:cNvSpPr>
+            <a:spLocks noGrp="1"/>
+          </p:cNvSpPr>
+          <p:nvPr>
+            <p:ph type="sldNum" sz="quarter" idx="4294967295"/>
+          </p:nvPr>
+        </p:nvSpPr>
+        <p:spPr>
+          <a:xfrm>
+            <a:off x="27432" y="91440"/>
+            <a:ext cx="585216" cy="475488"/>
+          </a:xfrm>
+          <a:prstGeom prst="rect">
+            <a:avLst/>
+          </a:prstGeom>
+          <a:extLst>
+            <a:ext uri="{C572A759-6A51-4108-AA02-DFA0A04FC94B}">
+              <ma14:wrappingTextBoxFlag xmlns:ma14="http://schemas.microsoft.com/office/mac/drawingml/2011/main" val="0"/>
+            </a:ext>
+          </a:extLst>
+        </p:spPr>
+        <p:txBody>
+          <a:bodyPr/>
+          <a:lstStyle>
+            <a:lvl1pPr>
+              <a:defRPr sz="2000">
+                <a:solidFill>
+                  <a:srgbClr val="FFFFFF"/>
+                </a:solidFill>
+                <a:latin typeface="Calibri"/>
+                <a:ea typeface="Calibri"/>
+                <a:cs typeface="Calibri"/>
+              </a:defRPr>
+            </a:lvl1pPr>
+          </a:lstStyle>
+          <a:p>
+            <a:pPr algn="ctr"/>
+            <a:fld id="{F7021451-1387-4CA6-816F-3879F97B5CBC}" type="slidenum">
+              <a:rPr b="1" lang="en-US"/>
+              <a:t>51</a:t>
+            </a:fld>
+            <a:endParaRPr lang="en-US"/>
+          </a:p>
+        </p:txBody>
+      </p:sp>
+    </p:spTree>
+  </p:cSld>
+  <p:clrMapOvr>
+    <a:masterClrMapping/>
+  </p:clrMapOvr>
+</p:sld>
+</file>
+
 <file path=ppt/slides/slide6.xml><?xml version="1.0" encoding="utf-8"?>
 <p:sld xmlns:a="http://schemas.openxmlformats.org/drawingml/2006/main" xmlns:r="http://schemas.openxmlformats.org/officeDocument/2006/relationships" xmlns:p="http://schemas.openxmlformats.org/presentationml/2006/main">
   <p:cSld name="Slide 6">
@@ -20302,7 +21094,7 @@
                 <a:ea typeface="Times New Roman" pitchFamily="34" charset="-122"/>
                 <a:cs typeface="Times New Roman" pitchFamily="34" charset="-120"/>
               </a:rPr>
-              <a:t>An egg has a shell, white and yolk.</a:t>
+              <a:t>An egg has a shell, a white and a yolk.</a:t>
             </a:r>
             <a:endParaRPr lang="en-US" sz="4000" dirty="0"/>
           </a:p>
@@ -20437,7 +21229,7 @@
         <p:spPr>
           <a:xfrm>
             <a:off x="0" y="658368"/>
-            <a:ext cx="5120640" cy="5833872"/>
+            <a:ext cx="3840480" cy="5833872"/>
           </a:xfrm>
           <a:prstGeom prst="rect">
             <a:avLst/>
@@ -20452,8 +21244,8 @@
         </p:nvSpPr>
         <p:spPr>
           <a:xfrm>
-            <a:off x="5349240" y="1005840"/>
-            <a:ext cx="6522415" cy="731520"/>
+            <a:off x="4069080" y="1005840"/>
+            <a:ext cx="7802575" cy="731520"/>
           </a:xfrm>
           <a:prstGeom prst="rect">
             <a:avLst/>
@@ -20493,8 +21285,8 @@
         </p:nvSpPr>
         <p:spPr>
           <a:xfrm>
-            <a:off x="5349240" y="1783080"/>
-            <a:ext cx="6522415" cy="4663440"/>
+            <a:off x="4069080" y="1783080"/>
+            <a:ext cx="7802575" cy="4663440"/>
           </a:xfrm>
           <a:prstGeom prst="rect">
             <a:avLst/>
@@ -20521,7 +21313,7 @@
                 <a:ea typeface="Times New Roman" pitchFamily="34" charset="-122"/>
                 <a:cs typeface="Times New Roman" pitchFamily="34" charset="-120"/>
               </a:rPr>
-              <a:t>Moussa cuts a boiled egg in two. He sees a thin shell, the white and a yellow yolk in the centre. His teacher tells him that the Earth also has layers like the egg.</a:t>
+              <a:t>Moussa cuts a boiled egg in two. He sees a thin shell, the white and a yellow yolk in the centre. His teacher says that the Earth also has layers like the egg. Moussa asks: "What are the layers inside the Earth?"</a:t>
             </a:r>
             <a:endParaRPr lang="en-US" sz="4000" dirty="0"/>
           </a:p>

--- a/lecons/F1/19_F1_M3_L11_The_Internal_Structure_of_the_Earth.pptx
+++ b/lecons/F1/19_F1_M3_L11_The_Internal_Structure_of_the_Earth.pptx
@@ -13024,7 +13024,7 @@
               <a:buNone/>
             </a:pPr>
             <a:r>
-              <a:rPr lang="en-US" sz="4000" b="1" dirty="0">
+              <a:rPr lang="en-US" sz="3200" b="1" dirty="0">
                 <a:solidFill>
                   <a:srgbClr val="111111"/>
                 </a:solidFill>
@@ -13034,7 +13034,7 @@
               </a:rPr>
               <a:t>Topic: Protection against the Wrath of Nature</a:t>
             </a:r>
-            <a:endParaRPr lang="en-US" sz="4000" dirty="0"/>
+            <a:endParaRPr lang="en-US" sz="3200" dirty="0"/>
           </a:p>
           <a:p>
             <a:pPr algn="l" indent="0" marL="0">
@@ -13044,7 +13044,7 @@
               <a:buNone/>
             </a:pPr>
             <a:r>
-              <a:rPr lang="en-US" sz="4000" b="1" dirty="0">
+              <a:rPr lang="en-US" sz="3200" b="1" dirty="0">
                 <a:solidFill>
                   <a:srgbClr val="111111"/>
                 </a:solidFill>
@@ -13054,7 +13054,7 @@
               </a:rPr>
               <a:t>Sub-topic: Movements of the Earth's Crust</a:t>
             </a:r>
-            <a:endParaRPr lang="en-US" sz="4000" dirty="0"/>
+            <a:endParaRPr lang="en-US" sz="3200" dirty="0"/>
           </a:p>
           <a:p>
             <a:pPr algn="l" indent="0" marL="0">
@@ -13064,7 +13064,7 @@
               <a:buNone/>
             </a:pPr>
             <a:r>
-              <a:rPr lang="en-US" sz="4000" b="1" dirty="0">
+              <a:rPr lang="en-US" sz="3200" b="1" dirty="0">
                 <a:solidFill>
                   <a:srgbClr val="990011"/>
                 </a:solidFill>
@@ -13074,7 +13074,7 @@
               </a:rPr>
               <a:t>Lesson 11: The Internal Structure of the Earth</a:t>
             </a:r>
-            <a:endParaRPr lang="en-US" sz="4000" dirty="0"/>
+            <a:endParaRPr lang="en-US" sz="3200" dirty="0"/>
           </a:p>
         </p:txBody>
       </p:sp>

--- a/lecons/F1/19_F1_M3_L11_The_Internal_Structure_of_the_Earth.pptx
+++ b/lecons/F1/19_F1_M3_L11_The_Internal_Structure_of_the_Earth.pptx
@@ -3456,7 +3456,7 @@
           <a:p>
             <a:r>
               <a:rPr lang="en-US" dirty="0"/>
-              <a:t>Before we start the new lesson, let us correct the homework I gave you at the end of Lesson 10: Climate Change and its Consequences. The question was: Propose three actions your family can take against climate change. Take out your exercise books.</a:t>
+              <a:t>Before we start the new lesson, let us correct the homework I gave you at the end of Lesson 10: Climate Change and its Consequences. The question was: Name the three layers of the Earth. Take out your exercise books.</a:t>
             </a:r>
             <a:endParaRPr lang="en-US" dirty="0"/>
           </a:p>
@@ -3984,7 +3984,7 @@
           <a:p>
             <a:r>
               <a:rPr lang="en-US" dirty="0"/>
-              <a:t>For your homework: Draw and label the internal structure of the Earth. We shall correct it at the beginning of our next lesson.</a:t>
+              <a:t>For your homework: Name the two types of plates. We shall correct it at the beginning of our next lesson.</a:t>
             </a:r>
             <a:endParaRPr lang="en-US" dirty="0"/>
           </a:p>
@@ -4424,7 +4424,7 @@
           <a:p>
             <a:r>
               <a:rPr lang="en-US" dirty="0"/>
-              <a:t>Here is a good answer. Plant trees around the house; switch off lights and use solar lamps; stop burning rubbish and use improved stoves that need less wood. Compare it with your own answer and correct your work in red.</a:t>
+              <a:t>Here is a good answer. The crust, the mantle and the core. Compare it with your own answer and correct your work in red.</a:t>
             </a:r>
             <a:endParaRPr lang="en-US" dirty="0"/>
           </a:p>
@@ -14998,7 +14998,7 @@
                 <a:ea typeface="Times New Roman" pitchFamily="34" charset="-122"/>
                 <a:cs typeface="Times New Roman" pitchFamily="34" charset="-120"/>
               </a:rPr>
-              <a:t>Propose three actions your family can take against climate change.</a:t>
+              <a:t>Name the three layers of the Earth.</a:t>
             </a:r>
             <a:endParaRPr lang="en-US" sz="4000" dirty="0"/>
           </a:p>
@@ -16378,7 +16378,7 @@
                 <a:ea typeface="Times New Roman" pitchFamily="34" charset="-122"/>
                 <a:cs typeface="Times New Roman" pitchFamily="34" charset="-120"/>
               </a:rPr>
-              <a:t>Draw and label the internal structure of the Earth.</a:t>
+              <a:t>Name the two types of plates.</a:t>
             </a:r>
             <a:endParaRPr lang="en-US" sz="4000" dirty="0"/>
           </a:p>
@@ -19042,7 +19042,7 @@
                           <a:ea typeface="Calibri" pitchFamily="34" charset="-122"/>
                           <a:cs typeface="Calibri" pitchFamily="34" charset="-120"/>
                         </a:rPr>
-                        <a:t>Draw and label the internal structure of the Earth.</a:t>
+                        <a:t>Name the two types of plates.</a:t>
                       </a:r>
                       <a:endParaRPr lang="en-US" sz="1600" dirty="0">
                         <a:latin typeface="Calibri" charset="0"/>
@@ -19587,7 +19587,7 @@
                 <a:ea typeface="Times New Roman" pitchFamily="34" charset="-122"/>
                 <a:cs typeface="Times New Roman" pitchFamily="34" charset="-120"/>
               </a:rPr>
-              <a:t>Plant trees around the house; switch off lights and use solar lamps; stop burning rubbish and use improved stoves that need less wood.</a:t>
+              <a:t>The crust, the mantle and the core.</a:t>
             </a:r>
             <a:endParaRPr lang="en-US" sz="4000" dirty="0"/>
           </a:p>
